--- a/Lec-23.pptx
+++ b/Lec-23.pptx
@@ -5,30 +5,33 @@
     <p:sldMasterId id="2147483648" r:id="rId1"/>
   </p:sldMasterIdLst>
   <p:notesMasterIdLst>
-    <p:notesMasterId r:id="rId23"/>
+    <p:notesMasterId r:id="rId26"/>
   </p:notesMasterIdLst>
   <p:sldIdLst>
-    <p:sldId id="337" r:id="rId2"/>
-    <p:sldId id="482" r:id="rId3"/>
-    <p:sldId id="483" r:id="rId4"/>
-    <p:sldId id="484" r:id="rId5"/>
-    <p:sldId id="485" r:id="rId6"/>
-    <p:sldId id="486" r:id="rId7"/>
-    <p:sldId id="487" r:id="rId8"/>
-    <p:sldId id="488" r:id="rId9"/>
-    <p:sldId id="489" r:id="rId10"/>
-    <p:sldId id="490" r:id="rId11"/>
-    <p:sldId id="491" r:id="rId12"/>
-    <p:sldId id="492" r:id="rId13"/>
-    <p:sldId id="493" r:id="rId14"/>
-    <p:sldId id="494" r:id="rId15"/>
-    <p:sldId id="495" r:id="rId16"/>
-    <p:sldId id="496" r:id="rId17"/>
-    <p:sldId id="497" r:id="rId18"/>
-    <p:sldId id="498" r:id="rId19"/>
-    <p:sldId id="500" r:id="rId20"/>
-    <p:sldId id="499" r:id="rId21"/>
-    <p:sldId id="501" r:id="rId22"/>
+    <p:sldId id="256" r:id="rId2"/>
+    <p:sldId id="257" r:id="rId3"/>
+    <p:sldId id="482" r:id="rId4"/>
+    <p:sldId id="483" r:id="rId5"/>
+    <p:sldId id="484" r:id="rId6"/>
+    <p:sldId id="485" r:id="rId7"/>
+    <p:sldId id="486" r:id="rId8"/>
+    <p:sldId id="487" r:id="rId9"/>
+    <p:sldId id="488" r:id="rId10"/>
+    <p:sldId id="489" r:id="rId11"/>
+    <p:sldId id="490" r:id="rId12"/>
+    <p:sldId id="491" r:id="rId13"/>
+    <p:sldId id="492" r:id="rId14"/>
+    <p:sldId id="493" r:id="rId15"/>
+    <p:sldId id="494" r:id="rId16"/>
+    <p:sldId id="495" r:id="rId17"/>
+    <p:sldId id="496" r:id="rId18"/>
+    <p:sldId id="497" r:id="rId19"/>
+    <p:sldId id="498" r:id="rId20"/>
+    <p:sldId id="500" r:id="rId21"/>
+    <p:sldId id="499" r:id="rId22"/>
+    <p:sldId id="501" r:id="rId23"/>
+    <p:sldId id="480" r:id="rId24"/>
+    <p:sldId id="481" r:id="rId25"/>
   </p:sldIdLst>
   <p:sldSz cx="9144000" cy="6858000" type="screen4x3"/>
   <p:notesSz cx="6858000" cy="9144000"/>
@@ -310,7 +313,7 @@
               <a:pPr>
                 <a:defRPr/>
               </a:pPr>
-              <a:t>9/25/2026</a:t>
+              <a:t>10/12/2026</a:t>
             </a:fld>
             <a:endParaRPr lang="en-US"/>
           </a:p>
@@ -760,7 +763,7 @@
           <a:bodyPr/>
           <a:lstStyle/>
           <a:p>
-            <a:endParaRPr lang="en-US" altLang="en-US"/>
+            <a:endParaRPr lang="en-US" altLang="en-US" dirty="0"/>
           </a:p>
         </p:txBody>
       </p:sp>
@@ -1635,615 +1638,6 @@
 </file>
 
 <file path=ppt/slideLayouts/slideLayout12.xml><?xml version="1.0" encoding="utf-8"?>
-<p:sldLayout xmlns:a="http://schemas.openxmlformats.org/drawingml/2006/main" xmlns:r="http://schemas.openxmlformats.org/officeDocument/2006/relationships" xmlns:p="http://schemas.openxmlformats.org/presentationml/2006/main" userDrawn="1">
-  <p:cSld name="Custom Layout">
-    <p:bg>
-      <p:bgPr>
-        <a:blipFill dpi="0" rotWithShape="0">
-          <a:blip r:embed="rId2"/>
-          <a:srcRect/>
-          <a:stretch>
-            <a:fillRect/>
-          </a:stretch>
-        </a:blipFill>
-        <a:effectLst/>
-      </p:bgPr>
-    </p:bg>
-    <p:spTree>
-      <p:nvGrpSpPr>
-        <p:cNvPr id="1" name=""/>
-        <p:cNvGrpSpPr/>
-        <p:nvPr/>
-      </p:nvGrpSpPr>
-      <p:grpSpPr>
-        <a:xfrm>
-          <a:off x="0" y="0"/>
-          <a:ext cx="0" cy="0"/>
-          <a:chOff x="0" y="0"/>
-          <a:chExt cx="0" cy="0"/>
-        </a:xfrm>
-      </p:grpSpPr>
-      <p:sp>
-        <p:nvSpPr>
-          <p:cNvPr id="3" name="Rectangle 2">
-            <a:extLst>
-              <a:ext uri="{FF2B5EF4-FFF2-40B4-BE49-F238E27FC236}">
-                <a16:creationId xmlns:a16="http://schemas.microsoft.com/office/drawing/2014/main" id="{AFFBFFBE-14B2-F0AF-F4AC-4976B5EA7B3E}"/>
-              </a:ext>
-            </a:extLst>
-          </p:cNvPr>
-          <p:cNvSpPr/>
-          <p:nvPr userDrawn="1"/>
-        </p:nvSpPr>
-        <p:spPr>
-          <a:xfrm>
-            <a:off x="0" y="3352800"/>
-            <a:ext cx="8686800" cy="2743200"/>
-          </a:xfrm>
-          <a:prstGeom prst="rect">
-            <a:avLst/>
-          </a:prstGeom>
-          <a:solidFill>
-            <a:srgbClr val="101141"/>
-          </a:solidFill>
-          <a:ln>
-            <a:noFill/>
-          </a:ln>
-          <a:effectLst/>
-        </p:spPr>
-        <p:style>
-          <a:lnRef idx="1">
-            <a:schemeClr val="accent1"/>
-          </a:lnRef>
-          <a:fillRef idx="3">
-            <a:schemeClr val="accent1"/>
-          </a:fillRef>
-          <a:effectRef idx="2">
-            <a:schemeClr val="accent1"/>
-          </a:effectRef>
-          <a:fontRef idx="minor">
-            <a:schemeClr val="lt1"/>
-          </a:fontRef>
-        </p:style>
-        <p:txBody>
-          <a:bodyPr anchor="ctr"/>
-          <a:lstStyle/>
-          <a:p>
-            <a:pPr algn="ctr" eaLnBrk="1" hangingPunct="1">
-              <a:defRPr/>
-            </a:pPr>
-            <a:endParaRPr lang="en-US" dirty="0">
-              <a:latin typeface="Arial" pitchFamily="34" charset="0"/>
-              <a:cs typeface="Arial" pitchFamily="34" charset="0"/>
-            </a:endParaRPr>
-          </a:p>
-        </p:txBody>
-      </p:sp>
-      <p:sp>
-        <p:nvSpPr>
-          <p:cNvPr id="4" name="Rectangle 3">
-            <a:extLst>
-              <a:ext uri="{FF2B5EF4-FFF2-40B4-BE49-F238E27FC236}">
-                <a16:creationId xmlns:a16="http://schemas.microsoft.com/office/drawing/2014/main" id="{FA176F73-2534-EA66-9BA3-389159441E1E}"/>
-              </a:ext>
-            </a:extLst>
-          </p:cNvPr>
-          <p:cNvSpPr/>
-          <p:nvPr userDrawn="1"/>
-        </p:nvSpPr>
-        <p:spPr>
-          <a:xfrm>
-            <a:off x="2895600" y="6096000"/>
-            <a:ext cx="2895600" cy="76200"/>
-          </a:xfrm>
-          <a:prstGeom prst="rect">
-            <a:avLst/>
-          </a:prstGeom>
-          <a:solidFill>
-            <a:srgbClr val="76C2E5"/>
-          </a:solidFill>
-          <a:ln>
-            <a:noFill/>
-          </a:ln>
-          <a:effectLst/>
-        </p:spPr>
-        <p:style>
-          <a:lnRef idx="1">
-            <a:schemeClr val="accent1"/>
-          </a:lnRef>
-          <a:fillRef idx="3">
-            <a:schemeClr val="accent1"/>
-          </a:fillRef>
-          <a:effectRef idx="2">
-            <a:schemeClr val="accent1"/>
-          </a:effectRef>
-          <a:fontRef idx="minor">
-            <a:schemeClr val="lt1"/>
-          </a:fontRef>
-        </p:style>
-        <p:txBody>
-          <a:bodyPr anchor="ctr"/>
-          <a:lstStyle/>
-          <a:p>
-            <a:pPr algn="ctr" eaLnBrk="1" hangingPunct="1">
-              <a:defRPr/>
-            </a:pPr>
-            <a:endParaRPr lang="en-US"/>
-          </a:p>
-        </p:txBody>
-      </p:sp>
-      <p:sp>
-        <p:nvSpPr>
-          <p:cNvPr id="5" name="Rectangle 4">
-            <a:extLst>
-              <a:ext uri="{FF2B5EF4-FFF2-40B4-BE49-F238E27FC236}">
-                <a16:creationId xmlns:a16="http://schemas.microsoft.com/office/drawing/2014/main" id="{41143B4A-14C2-1094-BE58-15BD80B6D446}"/>
-              </a:ext>
-            </a:extLst>
-          </p:cNvPr>
-          <p:cNvSpPr/>
-          <p:nvPr userDrawn="1"/>
-        </p:nvSpPr>
-        <p:spPr>
-          <a:xfrm>
-            <a:off x="0" y="6096000"/>
-            <a:ext cx="2895600" cy="76200"/>
-          </a:xfrm>
-          <a:prstGeom prst="rect">
-            <a:avLst/>
-          </a:prstGeom>
-          <a:solidFill>
-            <a:srgbClr val="FCB017"/>
-          </a:solidFill>
-          <a:ln>
-            <a:noFill/>
-          </a:ln>
-          <a:effectLst/>
-        </p:spPr>
-        <p:style>
-          <a:lnRef idx="1">
-            <a:schemeClr val="accent1"/>
-          </a:lnRef>
-          <a:fillRef idx="3">
-            <a:schemeClr val="accent1"/>
-          </a:fillRef>
-          <a:effectRef idx="2">
-            <a:schemeClr val="accent1"/>
-          </a:effectRef>
-          <a:fontRef idx="minor">
-            <a:schemeClr val="lt1"/>
-          </a:fontRef>
-        </p:style>
-        <p:txBody>
-          <a:bodyPr anchor="ctr"/>
-          <a:lstStyle/>
-          <a:p>
-            <a:pPr algn="ctr" eaLnBrk="1" hangingPunct="1">
-              <a:defRPr/>
-            </a:pPr>
-            <a:endParaRPr lang="en-US"/>
-          </a:p>
-        </p:txBody>
-      </p:sp>
-      <p:sp>
-        <p:nvSpPr>
-          <p:cNvPr id="6" name="Rectangle 5">
-            <a:extLst>
-              <a:ext uri="{FF2B5EF4-FFF2-40B4-BE49-F238E27FC236}">
-                <a16:creationId xmlns:a16="http://schemas.microsoft.com/office/drawing/2014/main" id="{A2D759AA-21D7-ABA4-D5D7-76848EAA814B}"/>
-              </a:ext>
-            </a:extLst>
-          </p:cNvPr>
-          <p:cNvSpPr/>
-          <p:nvPr userDrawn="1"/>
-        </p:nvSpPr>
-        <p:spPr>
-          <a:xfrm>
-            <a:off x="5791200" y="6096000"/>
-            <a:ext cx="2895600" cy="76200"/>
-          </a:xfrm>
-          <a:prstGeom prst="rect">
-            <a:avLst/>
-          </a:prstGeom>
-          <a:solidFill>
-            <a:srgbClr val="FF0000"/>
-          </a:solidFill>
-          <a:ln>
-            <a:noFill/>
-          </a:ln>
-          <a:effectLst/>
-        </p:spPr>
-        <p:style>
-          <a:lnRef idx="1">
-            <a:schemeClr val="accent1"/>
-          </a:lnRef>
-          <a:fillRef idx="3">
-            <a:schemeClr val="accent1"/>
-          </a:fillRef>
-          <a:effectRef idx="2">
-            <a:schemeClr val="accent1"/>
-          </a:effectRef>
-          <a:fontRef idx="minor">
-            <a:schemeClr val="lt1"/>
-          </a:fontRef>
-        </p:style>
-        <p:txBody>
-          <a:bodyPr anchor="ctr"/>
-          <a:lstStyle/>
-          <a:p>
-            <a:pPr algn="ctr" eaLnBrk="1" hangingPunct="1">
-              <a:defRPr/>
-            </a:pPr>
-            <a:endParaRPr lang="en-US"/>
-          </a:p>
-        </p:txBody>
-      </p:sp>
-      <p:pic>
-        <p:nvPicPr>
-          <p:cNvPr id="8" name="Picture 10" descr="BITS_university_logo_whitevert.png">
-            <a:extLst>
-              <a:ext uri="{FF2B5EF4-FFF2-40B4-BE49-F238E27FC236}">
-                <a16:creationId xmlns:a16="http://schemas.microsoft.com/office/drawing/2014/main" id="{4AC502B5-9275-C45A-F485-E98B733254DA}"/>
-              </a:ext>
-            </a:extLst>
-          </p:cNvPr>
-          <p:cNvPicPr>
-            <a:picLocks noChangeAspect="1"/>
-          </p:cNvPicPr>
-          <p:nvPr userDrawn="1"/>
-        </p:nvPicPr>
-        <p:blipFill>
-          <a:blip r:embed="rId3">
-            <a:extLst>
-              <a:ext uri="{28A0092B-C50C-407E-A947-70E740481C1C}">
-                <a14:useLocalDpi xmlns:a14="http://schemas.microsoft.com/office/drawing/2010/main" val="0"/>
-              </a:ext>
-            </a:extLst>
-          </a:blip>
-          <a:srcRect t="2" b="28592"/>
-          <a:stretch>
-            <a:fillRect/>
-          </a:stretch>
-        </p:blipFill>
-        <p:spPr bwMode="auto">
-          <a:xfrm>
-            <a:off x="76200" y="3352800"/>
-            <a:ext cx="2057400" cy="1979613"/>
-          </a:xfrm>
-          <a:prstGeom prst="rect">
-            <a:avLst/>
-          </a:prstGeom>
-          <a:noFill/>
-          <a:ln>
-            <a:noFill/>
-          </a:ln>
-          <a:extLst>
-            <a:ext uri="{909E8E84-426E-40DD-AFC4-6F175D3DCCD1}">
-              <a14:hiddenFill xmlns:a14="http://schemas.microsoft.com/office/drawing/2010/main">
-                <a:solidFill>
-                  <a:srgbClr val="FFFFFF"/>
-                </a:solidFill>
-              </a14:hiddenFill>
-            </a:ext>
-            <a:ext uri="{91240B29-F687-4F45-9708-019B960494DF}">
-              <a14:hiddenLine xmlns:a14="http://schemas.microsoft.com/office/drawing/2010/main" w="9525">
-                <a:solidFill>
-                  <a:srgbClr val="000000"/>
-                </a:solidFill>
-                <a:miter lim="800000"/>
-                <a:headEnd/>
-                <a:tailEnd/>
-              </a14:hiddenLine>
-            </a:ext>
-          </a:extLst>
-        </p:spPr>
-      </p:pic>
-      <p:sp>
-        <p:nvSpPr>
-          <p:cNvPr id="9" name="TextBox 8">
-            <a:extLst>
-              <a:ext uri="{FF2B5EF4-FFF2-40B4-BE49-F238E27FC236}">
-                <a16:creationId xmlns:a16="http://schemas.microsoft.com/office/drawing/2014/main" id="{68A90F2E-DD9A-35C4-D90C-49EB0FD21D5D}"/>
-              </a:ext>
-            </a:extLst>
-          </p:cNvPr>
-          <p:cNvSpPr txBox="1"/>
-          <p:nvPr userDrawn="1"/>
-        </p:nvSpPr>
-        <p:spPr>
-          <a:xfrm>
-            <a:off x="-76200" y="5257800"/>
-            <a:ext cx="2209800" cy="554038"/>
-          </a:xfrm>
-          <a:prstGeom prst="rect">
-            <a:avLst/>
-          </a:prstGeom>
-          <a:noFill/>
-        </p:spPr>
-        <p:txBody>
-          <a:bodyPr>
-            <a:spAutoFit/>
-          </a:bodyPr>
-          <a:lstStyle/>
-          <a:p>
-            <a:pPr algn="ctr" eaLnBrk="1" hangingPunct="1">
-              <a:defRPr/>
-            </a:pPr>
-            <a:r>
-              <a:rPr lang="en-US" sz="2900" b="1" spc="-150" dirty="0">
-                <a:solidFill>
-                  <a:schemeClr val="bg1"/>
-                </a:solidFill>
-                <a:latin typeface="Arial"/>
-                <a:cs typeface="Arial"/>
-              </a:rPr>
-              <a:t>BITS</a:t>
-            </a:r>
-            <a:r>
-              <a:rPr lang="en-US" sz="2900" spc="-150" dirty="0">
-                <a:solidFill>
-                  <a:schemeClr val="bg1"/>
-                </a:solidFill>
-                <a:latin typeface="Arial"/>
-                <a:cs typeface="Arial"/>
-              </a:rPr>
-              <a:t> Pilani</a:t>
-            </a:r>
-          </a:p>
-        </p:txBody>
-      </p:sp>
-      <p:sp>
-        <p:nvSpPr>
-          <p:cNvPr id="10" name="TextBox 9">
-            <a:extLst>
-              <a:ext uri="{FF2B5EF4-FFF2-40B4-BE49-F238E27FC236}">
-                <a16:creationId xmlns:a16="http://schemas.microsoft.com/office/drawing/2014/main" id="{CE235B97-BCD1-B200-8B0C-6E7F31A5DD6E}"/>
-              </a:ext>
-            </a:extLst>
-          </p:cNvPr>
-          <p:cNvSpPr txBox="1">
-            <a:spLocks noChangeArrowheads="1"/>
-          </p:cNvSpPr>
-          <p:nvPr userDrawn="1"/>
-        </p:nvSpPr>
-        <p:spPr bwMode="auto">
-          <a:xfrm>
-            <a:off x="152400" y="5667375"/>
-            <a:ext cx="1905000" cy="276225"/>
-          </a:xfrm>
-          <a:prstGeom prst="rect">
-            <a:avLst/>
-          </a:prstGeom>
-          <a:noFill/>
-          <a:ln>
-            <a:noFill/>
-          </a:ln>
-        </p:spPr>
-        <p:txBody>
-          <a:bodyPr>
-            <a:spAutoFit/>
-          </a:bodyPr>
-          <a:lstStyle>
-            <a:lvl1pPr eaLnBrk="0" hangingPunct="0">
-              <a:defRPr>
-                <a:solidFill>
-                  <a:schemeClr val="tx1"/>
-                </a:solidFill>
-                <a:latin typeface="Arial" charset="0"/>
-              </a:defRPr>
-            </a:lvl1pPr>
-            <a:lvl2pPr marL="742950" indent="-285750" eaLnBrk="0" hangingPunct="0">
-              <a:defRPr>
-                <a:solidFill>
-                  <a:schemeClr val="tx1"/>
-                </a:solidFill>
-                <a:latin typeface="Arial" charset="0"/>
-              </a:defRPr>
-            </a:lvl2pPr>
-            <a:lvl3pPr marL="1143000" indent="-228600" eaLnBrk="0" hangingPunct="0">
-              <a:defRPr>
-                <a:solidFill>
-                  <a:schemeClr val="tx1"/>
-                </a:solidFill>
-                <a:latin typeface="Arial" charset="0"/>
-              </a:defRPr>
-            </a:lvl3pPr>
-            <a:lvl4pPr marL="1600200" indent="-228600" eaLnBrk="0" hangingPunct="0">
-              <a:defRPr>
-                <a:solidFill>
-                  <a:schemeClr val="tx1"/>
-                </a:solidFill>
-                <a:latin typeface="Arial" charset="0"/>
-              </a:defRPr>
-            </a:lvl4pPr>
-            <a:lvl5pPr marL="2057400" indent="-228600" eaLnBrk="0" hangingPunct="0">
-              <a:defRPr>
-                <a:solidFill>
-                  <a:schemeClr val="tx1"/>
-                </a:solidFill>
-                <a:latin typeface="Arial" charset="0"/>
-              </a:defRPr>
-            </a:lvl5pPr>
-            <a:lvl6pPr marL="2514600" indent="-228600" eaLnBrk="0" fontAlgn="base" hangingPunct="0">
-              <a:spcBef>
-                <a:spcPct val="0"/>
-              </a:spcBef>
-              <a:spcAft>
-                <a:spcPct val="0"/>
-              </a:spcAft>
-              <a:defRPr>
-                <a:solidFill>
-                  <a:schemeClr val="tx1"/>
-                </a:solidFill>
-                <a:latin typeface="Arial" charset="0"/>
-              </a:defRPr>
-            </a:lvl6pPr>
-            <a:lvl7pPr marL="2971800" indent="-228600" eaLnBrk="0" fontAlgn="base" hangingPunct="0">
-              <a:spcBef>
-                <a:spcPct val="0"/>
-              </a:spcBef>
-              <a:spcAft>
-                <a:spcPct val="0"/>
-              </a:spcAft>
-              <a:defRPr>
-                <a:solidFill>
-                  <a:schemeClr val="tx1"/>
-                </a:solidFill>
-                <a:latin typeface="Arial" charset="0"/>
-              </a:defRPr>
-            </a:lvl7pPr>
-            <a:lvl8pPr marL="3429000" indent="-228600" eaLnBrk="0" fontAlgn="base" hangingPunct="0">
-              <a:spcBef>
-                <a:spcPct val="0"/>
-              </a:spcBef>
-              <a:spcAft>
-                <a:spcPct val="0"/>
-              </a:spcAft>
-              <a:defRPr>
-                <a:solidFill>
-                  <a:schemeClr val="tx1"/>
-                </a:solidFill>
-                <a:latin typeface="Arial" charset="0"/>
-              </a:defRPr>
-            </a:lvl8pPr>
-            <a:lvl9pPr marL="3886200" indent="-228600" eaLnBrk="0" fontAlgn="base" hangingPunct="0">
-              <a:spcBef>
-                <a:spcPct val="0"/>
-              </a:spcBef>
-              <a:spcAft>
-                <a:spcPct val="0"/>
-              </a:spcAft>
-              <a:defRPr>
-                <a:solidFill>
-                  <a:schemeClr val="tx1"/>
-                </a:solidFill>
-                <a:latin typeface="Arial" charset="0"/>
-              </a:defRPr>
-            </a:lvl9pPr>
-          </a:lstStyle>
-          <a:p>
-            <a:pPr eaLnBrk="1" hangingPunct="1">
-              <a:defRPr/>
-            </a:pPr>
-            <a:r>
-              <a:rPr lang="en-US" sz="1200">
-                <a:solidFill>
-                  <a:srgbClr val="FFFFFF"/>
-                </a:solidFill>
-                <a:cs typeface="Arial" charset="0"/>
-              </a:rPr>
-              <a:t>Pilani Campus</a:t>
-            </a:r>
-          </a:p>
-        </p:txBody>
-      </p:sp>
-      <p:sp>
-        <p:nvSpPr>
-          <p:cNvPr id="7" name="Content Placeholder 6"/>
-          <p:cNvSpPr>
-            <a:spLocks noGrp="1"/>
-          </p:cNvSpPr>
-          <p:nvPr>
-            <p:ph sz="quarter" idx="13"/>
-          </p:nvPr>
-        </p:nvSpPr>
-        <p:spPr>
-          <a:xfrm>
-            <a:off x="2514600" y="5410200"/>
-            <a:ext cx="6019800" cy="533400"/>
-          </a:xfrm>
-        </p:spPr>
-        <p:txBody>
-          <a:bodyPr anchor="b">
-            <a:noAutofit/>
-          </a:bodyPr>
-          <a:lstStyle>
-            <a:lvl1pPr marL="0" indent="0" algn="r">
-              <a:lnSpc>
-                <a:spcPts val="1800"/>
-              </a:lnSpc>
-              <a:spcBef>
-                <a:spcPts val="0"/>
-              </a:spcBef>
-              <a:buNone/>
-              <a:defRPr sz="1800" baseline="0">
-                <a:solidFill>
-                  <a:schemeClr val="bg1"/>
-                </a:solidFill>
-              </a:defRPr>
-            </a:lvl1pPr>
-          </a:lstStyle>
-          <a:p>
-            <a:pPr lvl="0"/>
-            <a:r>
-              <a:rPr lang="en-US"/>
-              <a:t>Click to edit Master text styles</a:t>
-            </a:r>
-          </a:p>
-          <a:p>
-            <a:pPr lvl="1"/>
-            <a:r>
-              <a:rPr lang="en-US"/>
-              <a:t>Second level</a:t>
-            </a:r>
-          </a:p>
-        </p:txBody>
-      </p:sp>
-      <p:sp>
-        <p:nvSpPr>
-          <p:cNvPr id="2" name="Title 1"/>
-          <p:cNvSpPr>
-            <a:spLocks noGrp="1"/>
-          </p:cNvSpPr>
-          <p:nvPr>
-            <p:ph type="title"/>
-          </p:nvPr>
-        </p:nvSpPr>
-        <p:spPr>
-          <a:xfrm>
-            <a:off x="2514600" y="3810000"/>
-            <a:ext cx="6019800" cy="1524000"/>
-          </a:xfrm>
-        </p:spPr>
-        <p:txBody>
-          <a:bodyPr>
-            <a:noAutofit/>
-          </a:bodyPr>
-          <a:lstStyle>
-            <a:lvl1pPr algn="l">
-              <a:lnSpc>
-                <a:spcPts val="4000"/>
-              </a:lnSpc>
-              <a:defRPr sz="4400" baseline="0">
-                <a:solidFill>
-                  <a:schemeClr val="bg1"/>
-                </a:solidFill>
-              </a:defRPr>
-            </a:lvl1pPr>
-          </a:lstStyle>
-          <a:p>
-            <a:r>
-              <a:rPr lang="en-US"/>
-              <a:t>Click to edit Master title style</a:t>
-            </a:r>
-            <a:endParaRPr lang="en-US" dirty="0"/>
-          </a:p>
-        </p:txBody>
-      </p:sp>
-    </p:spTree>
-    <p:extLst>
-      <p:ext uri="{BB962C8B-B14F-4D97-AF65-F5344CB8AC3E}">
-        <p14:creationId xmlns:p14="http://schemas.microsoft.com/office/powerpoint/2010/main" val="627371920"/>
-      </p:ext>
-    </p:extLst>
-  </p:cSld>
-  <p:clrMapOvr>
-    <a:masterClrMapping/>
-  </p:clrMapOvr>
-</p:sldLayout>
-</file>
-
-<file path=ppt/slideLayouts/slideLayout13.xml><?xml version="1.0" encoding="utf-8"?>
 <p:sldLayout xmlns:a="http://schemas.openxmlformats.org/drawingml/2006/main" xmlns:r="http://schemas.openxmlformats.org/officeDocument/2006/relationships" xmlns:p="http://schemas.openxmlformats.org/presentationml/2006/main" type="txAndObj">
   <p:cSld name="Title, Text, and Content">
     <p:spTree>
@@ -2537,7 +1931,7 @@
 </p:sldLayout>
 </file>
 
-<file path=ppt/slideLayouts/slideLayout14.xml><?xml version="1.0" encoding="utf-8"?>
+<file path=ppt/slideLayouts/slideLayout13.xml><?xml version="1.0" encoding="utf-8"?>
 <p:sldLayout xmlns:a="http://schemas.openxmlformats.org/drawingml/2006/main" xmlns:r="http://schemas.openxmlformats.org/officeDocument/2006/relationships" xmlns:p="http://schemas.openxmlformats.org/presentationml/2006/main" userDrawn="1">
   <p:cSld name="1_Title and Content">
     <p:spTree>
@@ -3576,6 +2970,599 @@
 </p:sldLayout>
 </file>
 
+<file path=ppt/slideLayouts/slideLayout14.xml><?xml version="1.0" encoding="utf-8"?>
+<p:sldLayout xmlns:a="http://schemas.openxmlformats.org/drawingml/2006/main" xmlns:r="http://schemas.openxmlformats.org/officeDocument/2006/relationships" xmlns:p="http://schemas.openxmlformats.org/presentationml/2006/main" userDrawn="1">
+  <p:cSld name="Custom Layout">
+    <p:bg>
+      <p:bgPr>
+        <a:blipFill>
+          <a:blip r:embed="rId2"/>
+          <a:stretch>
+            <a:fillRect/>
+          </a:stretch>
+        </a:blipFill>
+        <a:effectLst/>
+      </p:bgPr>
+    </p:bg>
+    <p:spTree>
+      <p:nvGrpSpPr>
+        <p:cNvPr id="1" name=""/>
+        <p:cNvGrpSpPr/>
+        <p:nvPr/>
+      </p:nvGrpSpPr>
+      <p:grpSpPr>
+        <a:xfrm>
+          <a:off x="0" y="0"/>
+          <a:ext cx="0" cy="0"/>
+          <a:chOff x="0" y="0"/>
+          <a:chExt cx="0" cy="0"/>
+        </a:xfrm>
+      </p:grpSpPr>
+      <p:sp>
+        <p:nvSpPr>
+          <p:cNvPr id="2" name="Rectangle 2"/>
+          <p:cNvSpPr/>
+          <p:nvPr/>
+        </p:nvSpPr>
+        <p:spPr>
+          <a:xfrm>
+            <a:off x="0" y="3352800"/>
+            <a:ext cx="8686800" cy="2743200"/>
+          </a:xfrm>
+          <a:prstGeom prst="rect">
+            <a:avLst/>
+          </a:prstGeom>
+          <a:solidFill>
+            <a:srgbClr val="101141"/>
+          </a:solidFill>
+          <a:ln w="0">
+            <a:noFill/>
+          </a:ln>
+          <a:effectLst>
+            <a:outerShdw blurRad="40000" dist="23000" dir="5400000">
+              <a:srgbClr val="000000">
+                <a:alpha val="35000"/>
+              </a:srgbClr>
+            </a:outerShdw>
+          </a:effectLst>
+        </p:spPr>
+        <p:txBody>
+          <a:bodyPr anchor="ctr"/>
+          <a:lstStyle/>
+          <a:p>
+            <a:pPr algn="ctr">
+              <a:spcBef>
+                <a:spcPct val="0"/>
+              </a:spcBef>
+              <a:spcAft>
+                <a:spcPct val="0"/>
+              </a:spcAft>
+            </a:pPr>
+            <a:endParaRPr lang="en-US" sz="1800" b="0" i="0" kern="1200">
+              <a:solidFill>
+                <a:schemeClr val="lt1"/>
+              </a:solidFill>
+              <a:latin typeface="Arial"/>
+            </a:endParaRPr>
+          </a:p>
+        </p:txBody>
+      </p:sp>
+      <p:sp>
+        <p:nvSpPr>
+          <p:cNvPr id="3" name="Rectangle 3"/>
+          <p:cNvSpPr/>
+          <p:nvPr/>
+        </p:nvSpPr>
+        <p:spPr>
+          <a:xfrm>
+            <a:off x="2895600" y="6096000"/>
+            <a:ext cx="2895600" cy="76200"/>
+          </a:xfrm>
+          <a:prstGeom prst="rect">
+            <a:avLst/>
+          </a:prstGeom>
+          <a:solidFill>
+            <a:srgbClr val="76C2E5"/>
+          </a:solidFill>
+          <a:ln w="0">
+            <a:noFill/>
+          </a:ln>
+          <a:effectLst>
+            <a:outerShdw blurRad="40000" dist="23000" dir="5400000">
+              <a:srgbClr val="000000">
+                <a:alpha val="35000"/>
+              </a:srgbClr>
+            </a:outerShdw>
+          </a:effectLst>
+        </p:spPr>
+        <p:txBody>
+          <a:bodyPr anchor="ctr"/>
+          <a:lstStyle/>
+          <a:p>
+            <a:pPr algn="ctr">
+              <a:spcBef>
+                <a:spcPct val="0"/>
+              </a:spcBef>
+              <a:spcAft>
+                <a:spcPct val="0"/>
+              </a:spcAft>
+            </a:pPr>
+            <a:endParaRPr lang="en-US" sz="1800" b="0" i="0" kern="1200">
+              <a:solidFill>
+                <a:schemeClr val="lt1"/>
+              </a:solidFill>
+              <a:latin typeface="Arial"/>
+            </a:endParaRPr>
+          </a:p>
+        </p:txBody>
+      </p:sp>
+      <p:sp>
+        <p:nvSpPr>
+          <p:cNvPr id="4" name="Rectangle 4"/>
+          <p:cNvSpPr/>
+          <p:nvPr/>
+        </p:nvSpPr>
+        <p:spPr>
+          <a:xfrm>
+            <a:off x="0" y="6096000"/>
+            <a:ext cx="2895600" cy="76200"/>
+          </a:xfrm>
+          <a:prstGeom prst="rect">
+            <a:avLst/>
+          </a:prstGeom>
+          <a:solidFill>
+            <a:srgbClr val="FCB017"/>
+          </a:solidFill>
+          <a:ln w="0">
+            <a:noFill/>
+          </a:ln>
+          <a:effectLst>
+            <a:outerShdw blurRad="40000" dist="23000" dir="5400000">
+              <a:srgbClr val="000000">
+                <a:alpha val="35000"/>
+              </a:srgbClr>
+            </a:outerShdw>
+          </a:effectLst>
+        </p:spPr>
+        <p:txBody>
+          <a:bodyPr anchor="ctr"/>
+          <a:lstStyle/>
+          <a:p>
+            <a:pPr algn="ctr">
+              <a:spcBef>
+                <a:spcPct val="0"/>
+              </a:spcBef>
+              <a:spcAft>
+                <a:spcPct val="0"/>
+              </a:spcAft>
+            </a:pPr>
+            <a:endParaRPr lang="en-US" sz="1800" b="0" i="0" kern="1200">
+              <a:solidFill>
+                <a:schemeClr val="lt1"/>
+              </a:solidFill>
+              <a:latin typeface="Arial"/>
+            </a:endParaRPr>
+          </a:p>
+        </p:txBody>
+      </p:sp>
+      <p:sp>
+        <p:nvSpPr>
+          <p:cNvPr id="5" name="Rectangle 5"/>
+          <p:cNvSpPr/>
+          <p:nvPr/>
+        </p:nvSpPr>
+        <p:spPr>
+          <a:xfrm>
+            <a:off x="5791200" y="6096000"/>
+            <a:ext cx="2895600" cy="76200"/>
+          </a:xfrm>
+          <a:prstGeom prst="rect">
+            <a:avLst/>
+          </a:prstGeom>
+          <a:solidFill>
+            <a:srgbClr val="FF0000"/>
+          </a:solidFill>
+          <a:ln w="0">
+            <a:noFill/>
+          </a:ln>
+          <a:effectLst>
+            <a:outerShdw blurRad="40000" dist="23000" dir="5400000">
+              <a:srgbClr val="000000">
+                <a:alpha val="35000"/>
+              </a:srgbClr>
+            </a:outerShdw>
+          </a:effectLst>
+        </p:spPr>
+        <p:txBody>
+          <a:bodyPr anchor="ctr"/>
+          <a:lstStyle/>
+          <a:p>
+            <a:pPr algn="ctr">
+              <a:spcBef>
+                <a:spcPct val="0"/>
+              </a:spcBef>
+              <a:spcAft>
+                <a:spcPct val="0"/>
+              </a:spcAft>
+            </a:pPr>
+            <a:endParaRPr lang="en-US" sz="1800" b="0" i="0" kern="1200">
+              <a:solidFill>
+                <a:schemeClr val="lt1"/>
+              </a:solidFill>
+              <a:latin typeface="Arial"/>
+            </a:endParaRPr>
+          </a:p>
+        </p:txBody>
+      </p:sp>
+      <p:pic>
+        <p:nvPicPr>
+          <p:cNvPr id="6" name="Picture 10" descr="BITS_university_logo_whitevert.png"/>
+          <p:cNvPicPr/>
+          <p:nvPr/>
+        </p:nvPicPr>
+        <p:blipFill>
+          <a:blip r:embed="rId3"/>
+          <a:srcRect t="2" b="28592"/>
+          <a:stretch>
+            <a:fillRect/>
+          </a:stretch>
+        </p:blipFill>
+        <p:spPr>
+          <a:xfrm>
+            <a:off x="76200" y="3352800"/>
+            <a:ext cx="2057400" cy="1979613"/>
+          </a:xfrm>
+          <a:prstGeom prst="rect">
+            <a:avLst/>
+          </a:prstGeom>
+          <a:ln w="0">
+            <a:noFill/>
+          </a:ln>
+        </p:spPr>
+      </p:pic>
+      <p:sp>
+        <p:nvSpPr>
+          <p:cNvPr id="7" name="TextBox 8"/>
+          <p:cNvSpPr/>
+          <p:nvPr/>
+        </p:nvSpPr>
+        <p:spPr>
+          <a:xfrm>
+            <a:off x="-76200" y="5257800"/>
+            <a:ext cx="2209800" cy="554038"/>
+          </a:xfrm>
+          <a:prstGeom prst="rect">
+            <a:avLst/>
+          </a:prstGeom>
+          <a:noFill/>
+        </p:spPr>
+        <p:txBody>
+          <a:bodyPr>
+            <a:spAutoFit/>
+          </a:bodyPr>
+          <a:lstStyle/>
+          <a:p>
+            <a:pPr algn="ctr">
+              <a:spcBef>
+                <a:spcPct val="0"/>
+              </a:spcBef>
+              <a:spcAft>
+                <a:spcPct val="0"/>
+              </a:spcAft>
+            </a:pPr>
+            <a:r>
+              <a:rPr lang="en-US" sz="2900" b="1" i="0" kern="1200" spc="-150">
+                <a:solidFill>
+                  <a:schemeClr val="bg1"/>
+                </a:solidFill>
+                <a:latin typeface="Arial"/>
+              </a:rPr>
+              <a:t>BITS</a:t>
+            </a:r>
+            <a:r>
+              <a:rPr lang="en-US" sz="2900" b="0" i="0" kern="1200" spc="-150">
+                <a:solidFill>
+                  <a:schemeClr val="bg1"/>
+                </a:solidFill>
+                <a:latin typeface="Arial"/>
+              </a:rPr>
+              <a:t> Pilani</a:t>
+            </a:r>
+            <a:endParaRPr lang="en-US"/>
+          </a:p>
+        </p:txBody>
+      </p:sp>
+      <p:sp>
+        <p:nvSpPr>
+          <p:cNvPr id="8" name="TextBox 9"/>
+          <p:cNvSpPr/>
+          <p:nvPr/>
+        </p:nvSpPr>
+        <p:spPr>
+          <a:xfrm>
+            <a:off x="152400" y="5667375"/>
+            <a:ext cx="1905000" cy="276225"/>
+          </a:xfrm>
+          <a:prstGeom prst="rect">
+            <a:avLst/>
+          </a:prstGeom>
+          <a:noFill/>
+          <a:ln w="0">
+            <a:noFill/>
+          </a:ln>
+        </p:spPr>
+        <p:txBody>
+          <a:bodyPr>
+            <a:spAutoFit/>
+          </a:bodyPr>
+          <a:lstStyle>
+            <a:lvl1pPr>
+              <a:defRPr>
+                <a:solidFill>
+                  <a:schemeClr val="tx1"/>
+                </a:solidFill>
+                <a:latin typeface="Arial"/>
+              </a:defRPr>
+            </a:lvl1pPr>
+            <a:lvl2pPr marL="742950" indent="-285750">
+              <a:defRPr>
+                <a:solidFill>
+                  <a:schemeClr val="tx1"/>
+                </a:solidFill>
+                <a:latin typeface="Arial"/>
+              </a:defRPr>
+            </a:lvl2pPr>
+            <a:lvl3pPr marL="1143000" indent="-228600">
+              <a:defRPr>
+                <a:solidFill>
+                  <a:schemeClr val="tx1"/>
+                </a:solidFill>
+                <a:latin typeface="Arial"/>
+              </a:defRPr>
+            </a:lvl3pPr>
+            <a:lvl4pPr marL="1600200" indent="-228600">
+              <a:defRPr>
+                <a:solidFill>
+                  <a:schemeClr val="tx1"/>
+                </a:solidFill>
+                <a:latin typeface="Arial"/>
+              </a:defRPr>
+            </a:lvl4pPr>
+            <a:lvl5pPr marL="2057400" indent="-228600">
+              <a:defRPr>
+                <a:solidFill>
+                  <a:schemeClr val="tx1"/>
+                </a:solidFill>
+                <a:latin typeface="Arial"/>
+              </a:defRPr>
+            </a:lvl5pPr>
+            <a:lvl6pPr marL="2514600" indent="-228600">
+              <a:spcBef>
+                <a:spcPct val="0"/>
+              </a:spcBef>
+              <a:spcAft>
+                <a:spcPct val="0"/>
+              </a:spcAft>
+              <a:defRPr>
+                <a:solidFill>
+                  <a:schemeClr val="tx1"/>
+                </a:solidFill>
+                <a:latin typeface="Arial"/>
+              </a:defRPr>
+            </a:lvl6pPr>
+            <a:lvl7pPr marL="2971800" indent="-228600">
+              <a:spcBef>
+                <a:spcPct val="0"/>
+              </a:spcBef>
+              <a:spcAft>
+                <a:spcPct val="0"/>
+              </a:spcAft>
+              <a:defRPr>
+                <a:solidFill>
+                  <a:schemeClr val="tx1"/>
+                </a:solidFill>
+                <a:latin typeface="Arial"/>
+              </a:defRPr>
+            </a:lvl7pPr>
+            <a:lvl8pPr marL="3429000" indent="-228600">
+              <a:spcBef>
+                <a:spcPct val="0"/>
+              </a:spcBef>
+              <a:spcAft>
+                <a:spcPct val="0"/>
+              </a:spcAft>
+              <a:defRPr>
+                <a:solidFill>
+                  <a:schemeClr val="tx1"/>
+                </a:solidFill>
+                <a:latin typeface="Arial"/>
+              </a:defRPr>
+            </a:lvl8pPr>
+            <a:lvl9pPr marL="3886200" indent="-228600">
+              <a:spcBef>
+                <a:spcPct val="0"/>
+              </a:spcBef>
+              <a:spcAft>
+                <a:spcPct val="0"/>
+              </a:spcAft>
+              <a:defRPr>
+                <a:solidFill>
+                  <a:schemeClr val="tx1"/>
+                </a:solidFill>
+                <a:latin typeface="Arial"/>
+              </a:defRPr>
+            </a:lvl9pPr>
+          </a:lstStyle>
+          <a:p>
+            <a:pPr>
+              <a:spcBef>
+                <a:spcPct val="0"/>
+              </a:spcBef>
+              <a:spcAft>
+                <a:spcPct val="0"/>
+              </a:spcAft>
+            </a:pPr>
+            <a:r>
+              <a:rPr lang="en-US" sz="1200" b="0" i="0" kern="1200">
+                <a:solidFill>
+                  <a:srgbClr val="FFFFFF"/>
+                </a:solidFill>
+                <a:latin typeface="Arial"/>
+              </a:rPr>
+              <a:t>Pilani Campus</a:t>
+            </a:r>
+            <a:endParaRPr lang="en-US"/>
+          </a:p>
+        </p:txBody>
+      </p:sp>
+      <p:sp>
+        <p:nvSpPr>
+          <p:cNvPr id="9" name="Content Placeholder 6"/>
+          <p:cNvSpPr>
+            <a:spLocks noGrp="1"/>
+          </p:cNvSpPr>
+          <p:nvPr>
+            <p:ph sz="quarter" idx="13"/>
+          </p:nvPr>
+        </p:nvSpPr>
+        <p:spPr>
+          <a:xfrm>
+            <a:off x="2514600" y="5410200"/>
+            <a:ext cx="6019800" cy="533400"/>
+          </a:xfrm>
+        </p:spPr>
+        <p:txBody>
+          <a:bodyPr anchor="b"/>
+          <a:lstStyle>
+            <a:lvl1pPr marL="0" indent="0" algn="r">
+              <a:lnSpc>
+                <a:spcPts val="1800"/>
+              </a:lnSpc>
+              <a:spcBef>
+                <a:spcPts val="0"/>
+              </a:spcBef>
+              <a:buNone/>
+              <a:defRPr sz="1800" baseline="0">
+                <a:solidFill>
+                  <a:schemeClr val="bg1"/>
+                </a:solidFill>
+              </a:defRPr>
+            </a:lvl1pPr>
+          </a:lstStyle>
+          <a:p>
+            <a:pPr>
+              <a:lnSpc>
+                <a:spcPts val="1800"/>
+              </a:lnSpc>
+              <a:spcBef>
+                <a:spcPts val="0"/>
+              </a:spcBef>
+              <a:spcAft>
+                <a:spcPct val="0"/>
+              </a:spcAft>
+              <a:buNone/>
+            </a:pPr>
+            <a:r>
+              <a:rPr lang="en-US" sz="1800" b="0" i="0" kern="1200" baseline="0">
+                <a:solidFill>
+                  <a:schemeClr val="bg1"/>
+                </a:solidFill>
+                <a:latin typeface="Arial"/>
+              </a:rPr>
+              <a:t>Click to edit Master text styles</a:t>
+            </a:r>
+            <a:endParaRPr lang="en-US"/>
+          </a:p>
+          <a:p>
+            <a:pPr lvl="1">
+              <a:spcBef>
+                <a:spcPct val="0"/>
+              </a:spcBef>
+              <a:spcAft>
+                <a:spcPct val="0"/>
+              </a:spcAft>
+            </a:pPr>
+            <a:r>
+              <a:rPr lang="en-US" sz="1800" b="0" i="0" kern="1200">
+                <a:solidFill>
+                  <a:schemeClr val="tx1"/>
+                </a:solidFill>
+                <a:latin typeface="Arial"/>
+              </a:rPr>
+              <a:t>Second level</a:t>
+            </a:r>
+            <a:endParaRPr lang="en-US"/>
+          </a:p>
+        </p:txBody>
+      </p:sp>
+      <p:sp>
+        <p:nvSpPr>
+          <p:cNvPr id="10" name="Title 1"/>
+          <p:cNvSpPr>
+            <a:spLocks noGrp="1"/>
+          </p:cNvSpPr>
+          <p:nvPr>
+            <p:ph type="title"/>
+          </p:nvPr>
+        </p:nvSpPr>
+        <p:spPr>
+          <a:xfrm>
+            <a:off x="2514600" y="3810000"/>
+            <a:ext cx="6019800" cy="1524000"/>
+          </a:xfrm>
+        </p:spPr>
+        <p:txBody>
+          <a:bodyPr/>
+          <a:lstStyle>
+            <a:lvl1pPr algn="l">
+              <a:lnSpc>
+                <a:spcPts val="4000"/>
+              </a:lnSpc>
+              <a:defRPr sz="4400" baseline="0">
+                <a:solidFill>
+                  <a:schemeClr val="bg1"/>
+                </a:solidFill>
+              </a:defRPr>
+            </a:lvl1pPr>
+          </a:lstStyle>
+          <a:p>
+            <a:pPr>
+              <a:lnSpc>
+                <a:spcPts val="4000"/>
+              </a:lnSpc>
+              <a:spcBef>
+                <a:spcPct val="0"/>
+              </a:spcBef>
+              <a:spcAft>
+                <a:spcPct val="0"/>
+              </a:spcAft>
+            </a:pPr>
+            <a:r>
+              <a:rPr lang="en-US" sz="4400" b="0" i="0" kern="1200" baseline="0">
+                <a:solidFill>
+                  <a:schemeClr val="bg1"/>
+                </a:solidFill>
+                <a:latin typeface="Calibri"/>
+              </a:rPr>
+              <a:t>Click to edit Master title style</a:t>
+            </a:r>
+            <a:endParaRPr lang="en-US"/>
+          </a:p>
+        </p:txBody>
+      </p:sp>
+    </p:spTree>
+    <p:extLst>
+      <p:ext uri="{BB962C8B-B14F-4D97-AF65-F5344CB8AC3E}">
+        <p14:creationId xmlns:p14="http://schemas.microsoft.com/office/powerpoint/2010/main" val="3246105728"/>
+      </p:ext>
+    </p:extLst>
+  </p:cSld>
+  <p:clrMapOvr>
+    <a:masterClrMapping/>
+  </p:clrMapOvr>
+</p:sldLayout>
+</file>
+
 <file path=ppt/slideLayouts/slideLayout2.xml><?xml version="1.0" encoding="utf-8"?>
 <p:sldLayout xmlns:a="http://schemas.openxmlformats.org/drawingml/2006/main" xmlns:r="http://schemas.openxmlformats.org/officeDocument/2006/relationships" xmlns:p="http://schemas.openxmlformats.org/presentationml/2006/main" type="obj" preserve="1">
   <p:cSld name="Title and Content">
@@ -6120,9 +6107,9 @@
     <p:sldLayoutId id="2147484841" r:id="rId9"/>
     <p:sldLayoutId id="2147484842" r:id="rId10"/>
     <p:sldLayoutId id="2147484843" r:id="rId11"/>
-    <p:sldLayoutId id="2147484844" r:id="rId12"/>
-    <p:sldLayoutId id="2147484861" r:id="rId13"/>
-    <p:sldLayoutId id="2147484862" r:id="rId14"/>
+    <p:sldLayoutId id="2147484861" r:id="rId12"/>
+    <p:sldLayoutId id="2147484862" r:id="rId13"/>
+    <p:sldLayoutId id="2147484863" r:id="rId14"/>
   </p:sldLayoutIdLst>
   <p:hf hdr="0" ftr="0"/>
   <p:txStyles>
@@ -6526,13 +6513,7 @@
       </p:grpSpPr>
       <p:sp>
         <p:nvSpPr>
-          <p:cNvPr id="20482" name="Title 4">
-            <a:extLst>
-              <a:ext uri="{FF2B5EF4-FFF2-40B4-BE49-F238E27FC236}">
-                <a16:creationId xmlns:a16="http://schemas.microsoft.com/office/drawing/2014/main" id="{82CCF8E8-8D44-B829-5D34-BCFE6E2C9411}"/>
-              </a:ext>
-            </a:extLst>
-          </p:cNvPr>
+          <p:cNvPr id="2" name="Title 4"/>
           <p:cNvSpPr>
             <a:spLocks noGrp="1"/>
           </p:cNvSpPr>
@@ -6540,43 +6521,50 @@
             <p:ph type="title"/>
           </p:nvPr>
         </p:nvSpPr>
-        <p:spPr/>
+        <p:spPr>
+          <a:xfrm>
+            <a:off x="2514600" y="3810000"/>
+            <a:ext cx="6019800" cy="1524000"/>
+          </a:xfrm>
+          <a:prstGeom prst="rect">
+            <a:avLst/>
+          </a:prstGeom>
+          <a:noFill/>
+          <a:ln w="0">
+            <a:noFill/>
+          </a:ln>
+        </p:spPr>
         <p:txBody>
-          <a:bodyPr/>
+          <a:bodyPr vert="horz" lIns="91440" tIns="45720" rIns="91440" bIns="45720" anchor="ctr"/>
           <a:lstStyle/>
           <a:p>
-            <a:pPr algn="ctr"/>
-            <a:r>
-              <a:rPr lang="en-US" altLang="en-US" dirty="0"/>
-              <a:t>BITS </a:t>
-            </a:r>
-            <a:r>
-              <a:rPr lang="en-US" altLang="en-US" dirty="0" err="1"/>
-              <a:t>Pilani</a:t>
-            </a:r>
-            <a:r>
-              <a:rPr lang="en-US" altLang="en-US" dirty="0"/>
-              <a:t> </a:t>
-            </a:r>
-            <a:br>
-              <a:rPr lang="en-US" altLang="en-US" dirty="0"/>
-            </a:br>
-            <a:r>
-              <a:rPr lang="en-US" altLang="en-US" dirty="0"/>
+            <a:pPr algn="ctr">
+              <a:lnSpc>
+                <a:spcPts val="4000"/>
+              </a:lnSpc>
+              <a:spcBef>
+                <a:spcPct val="0"/>
+              </a:spcBef>
+              <a:spcAft>
+                <a:spcPct val="0"/>
+              </a:spcAft>
+            </a:pPr>
+            <a:r>
+              <a:rPr lang="en-US" altLang="en-US" sz="4400" b="0" i="0" kern="1200" baseline="0">
+                <a:solidFill>
+                  <a:schemeClr val="bg1"/>
+                </a:solidFill>
+                <a:latin typeface="Calibri"/>
+              </a:rPr>
               <a:t>Digital Design</a:t>
             </a:r>
+            <a:endParaRPr lang="en-US"/>
           </a:p>
         </p:txBody>
       </p:sp>
       <p:sp>
         <p:nvSpPr>
-          <p:cNvPr id="2" name="Content Placeholder 1">
-            <a:extLst>
-              <a:ext uri="{FF2B5EF4-FFF2-40B4-BE49-F238E27FC236}">
-                <a16:creationId xmlns:a16="http://schemas.microsoft.com/office/drawing/2014/main" id="{E4BD772D-9840-4762-E3C3-128057D3E943}"/>
-              </a:ext>
-            </a:extLst>
-          </p:cNvPr>
+          <p:cNvPr id="3" name="Content Placeholder 1"/>
           <p:cNvSpPr>
             <a:spLocks noGrp="1"/>
           </p:cNvSpPr>
@@ -6584,23 +6572,86 @@
             <p:ph sz="quarter" idx="13"/>
           </p:nvPr>
         </p:nvSpPr>
-        <p:spPr/>
+        <p:spPr>
+          <a:xfrm>
+            <a:off x="2514600" y="5410200"/>
+            <a:ext cx="6019800" cy="533400"/>
+          </a:xfrm>
+        </p:spPr>
         <p:txBody>
-          <a:bodyPr/>
+          <a:bodyPr anchor="b"/>
           <a:lstStyle/>
           <a:p>
-            <a:r>
-              <a:rPr lang="en-US" dirty="0"/>
-              <a:t>Prof. GSS </a:t>
-            </a:r>
-            <a:r>
-              <a:rPr lang="en-US" dirty="0" err="1"/>
-              <a:t>Chalapathi</a:t>
-            </a:r>
-            <a:r>
-              <a:rPr lang="en-US" dirty="0"/>
-              <a:t>, Prof. Saurabh Gandhi (EEE department)</a:t>
-            </a:r>
+            <a:pPr>
+              <a:lnSpc>
+                <a:spcPts val="1800"/>
+              </a:lnSpc>
+              <a:spcBef>
+                <a:spcPts val="0"/>
+              </a:spcBef>
+              <a:spcAft>
+                <a:spcPct val="0"/>
+              </a:spcAft>
+              <a:buNone/>
+            </a:pPr>
+            <a:r>
+              <a:rPr lang="en-US" sz="1800" b="0" i="0" kern="1200" baseline="0">
+                <a:solidFill>
+                  <a:schemeClr val="bg1"/>
+                </a:solidFill>
+                <a:latin typeface="Arial"/>
+              </a:rPr>
+              <a:t>Prof. GSS Chalapathi,</a:t>
+            </a:r>
+            <a:endParaRPr lang="en-US"/>
+          </a:p>
+          <a:p>
+            <a:pPr>
+              <a:lnSpc>
+                <a:spcPts val="1800"/>
+              </a:lnSpc>
+              <a:spcBef>
+                <a:spcPts val="0"/>
+              </a:spcBef>
+              <a:spcAft>
+                <a:spcPct val="0"/>
+              </a:spcAft>
+              <a:buNone/>
+            </a:pPr>
+            <a:r>
+              <a:rPr lang="en-US" sz="1800" b="0" i="0" kern="1200" baseline="0">
+                <a:solidFill>
+                  <a:schemeClr val="bg1"/>
+                </a:solidFill>
+                <a:latin typeface="Arial"/>
+              </a:rPr>
+              <a:t>Prof. Saurabh Gandhi,</a:t>
+            </a:r>
+            <a:endParaRPr lang="en-US"/>
+          </a:p>
+          <a:p>
+            <a:pPr>
+              <a:lnSpc>
+                <a:spcPts val="1800"/>
+              </a:lnSpc>
+              <a:spcBef>
+                <a:spcPts val="0"/>
+              </a:spcBef>
+              <a:spcAft>
+                <a:spcPct val="0"/>
+              </a:spcAft>
+              <a:buNone/>
+            </a:pPr>
+            <a:r>
+              <a:rPr lang="en-US" sz="1800" b="0" i="0" kern="1200" baseline="0">
+                <a:solidFill>
+                  <a:schemeClr val="bg1"/>
+                </a:solidFill>
+                <a:latin typeface="Arial"/>
+              </a:rPr>
+              <a:t>Prof. Ramesh Sambangi</a:t>
+            </a:r>
+            <a:endParaRPr lang="en-US"/>
           </a:p>
         </p:txBody>
       </p:sp>
@@ -6613,6 +6664,137 @@
 </file>
 
 <file path=ppt/slides/slide10.xml><?xml version="1.0" encoding="utf-8"?>
+<p:sld xmlns:a="http://schemas.openxmlformats.org/drawingml/2006/main" xmlns:r="http://schemas.openxmlformats.org/officeDocument/2006/relationships" xmlns:p="http://schemas.openxmlformats.org/presentationml/2006/main">
+  <p:cSld>
+    <p:spTree>
+      <p:nvGrpSpPr>
+        <p:cNvPr id="1" name=""/>
+        <p:cNvGrpSpPr/>
+        <p:nvPr/>
+      </p:nvGrpSpPr>
+      <p:grpSpPr>
+        <a:xfrm>
+          <a:off x="0" y="0"/>
+          <a:ext cx="0" cy="0"/>
+          <a:chOff x="0" y="0"/>
+          <a:chExt cx="0" cy="0"/>
+        </a:xfrm>
+      </p:grpSpPr>
+      <p:sp>
+        <p:nvSpPr>
+          <p:cNvPr id="3" name="Content Placeholder 2">
+            <a:extLst>
+              <a:ext uri="{FF2B5EF4-FFF2-40B4-BE49-F238E27FC236}">
+                <a16:creationId xmlns:a16="http://schemas.microsoft.com/office/drawing/2014/main" id="{3B1009BF-5637-6497-7999-FAE1505BC040}"/>
+              </a:ext>
+            </a:extLst>
+          </p:cNvPr>
+          <p:cNvSpPr>
+            <a:spLocks noGrp="1"/>
+          </p:cNvSpPr>
+          <p:nvPr>
+            <p:ph sz="quarter" idx="10"/>
+          </p:nvPr>
+        </p:nvSpPr>
+        <p:spPr/>
+        <p:txBody>
+          <a:bodyPr/>
+          <a:lstStyle/>
+          <a:p>
+            <a:r>
+              <a:rPr lang="en-US" dirty="0"/>
+              <a:t>Shift registers</a:t>
+            </a:r>
+            <a:endParaRPr lang="en-IN" dirty="0"/>
+          </a:p>
+        </p:txBody>
+      </p:sp>
+      <p:pic>
+        <p:nvPicPr>
+          <p:cNvPr id="4" name="Picture 2">
+            <a:extLst>
+              <a:ext uri="{FF2B5EF4-FFF2-40B4-BE49-F238E27FC236}">
+                <a16:creationId xmlns:a16="http://schemas.microsoft.com/office/drawing/2014/main" id="{5CE98A39-670D-046E-38CA-C085F0B590CC}"/>
+              </a:ext>
+            </a:extLst>
+          </p:cNvPr>
+          <p:cNvPicPr>
+            <a:picLocks noGrp="1" noChangeAspect="1" noChangeArrowheads="1"/>
+          </p:cNvPicPr>
+          <p:nvPr>
+            <p:ph idx="1"/>
+          </p:nvPr>
+        </p:nvPicPr>
+        <p:blipFill rotWithShape="1">
+          <a:blip r:embed="rId2">
+            <a:extLst>
+              <a:ext uri="{28A0092B-C50C-407E-A947-70E740481C1C}">
+                <a14:useLocalDpi xmlns:a14="http://schemas.microsoft.com/office/drawing/2010/main" val="0"/>
+              </a:ext>
+            </a:extLst>
+          </a:blip>
+          <a:srcRect t="11387"/>
+          <a:stretch>
+            <a:fillRect/>
+          </a:stretch>
+        </p:blipFill>
+        <p:spPr bwMode="auto">
+          <a:xfrm>
+            <a:off x="304800" y="1447800"/>
+            <a:ext cx="8534400" cy="5050344"/>
+          </a:xfrm>
+          <a:prstGeom prst="rect">
+            <a:avLst/>
+          </a:prstGeom>
+          <a:noFill/>
+          <a:ln>
+            <a:noFill/>
+          </a:ln>
+          <a:effectLst/>
+          <a:extLst>
+            <a:ext uri="{909E8E84-426E-40DD-AFC4-6F175D3DCCD1}">
+              <a14:hiddenFill xmlns:a14="http://schemas.microsoft.com/office/drawing/2010/main">
+                <a:solidFill>
+                  <a:schemeClr val="accent1"/>
+                </a:solidFill>
+              </a14:hiddenFill>
+            </a:ext>
+            <a:ext uri="{91240B29-F687-4F45-9708-019B960494DF}">
+              <a14:hiddenLine xmlns:a14="http://schemas.microsoft.com/office/drawing/2010/main" w="9525">
+                <a:solidFill>
+                  <a:schemeClr val="tx1"/>
+                </a:solidFill>
+                <a:miter lim="800000"/>
+                <a:headEnd/>
+                <a:tailEnd/>
+              </a14:hiddenLine>
+            </a:ext>
+            <a:ext uri="{AF507438-7753-43E0-B8FC-AC1667EBCBE1}">
+              <a14:hiddenEffects xmlns:a14="http://schemas.microsoft.com/office/drawing/2010/main">
+                <a:effectLst>
+                  <a:outerShdw dist="35921" dir="2700000" algn="ctr" rotWithShape="0">
+                    <a:schemeClr val="bg2"/>
+                  </a:outerShdw>
+                </a:effectLst>
+              </a14:hiddenEffects>
+            </a:ext>
+          </a:extLst>
+        </p:spPr>
+      </p:pic>
+    </p:spTree>
+    <p:extLst>
+      <p:ext uri="{BB962C8B-B14F-4D97-AF65-F5344CB8AC3E}">
+        <p14:creationId xmlns:p14="http://schemas.microsoft.com/office/powerpoint/2010/main" val="2871934050"/>
+      </p:ext>
+    </p:extLst>
+  </p:cSld>
+  <p:clrMapOvr>
+    <a:masterClrMapping/>
+  </p:clrMapOvr>
+</p:sld>
+</file>
+
+<file path=ppt/slides/slide11.xml><?xml version="1.0" encoding="utf-8"?>
 <p:sld xmlns:a="http://schemas.openxmlformats.org/drawingml/2006/main" xmlns:r="http://schemas.openxmlformats.org/officeDocument/2006/relationships" xmlns:p="http://schemas.openxmlformats.org/presentationml/2006/main">
   <p:cSld>
     <p:spTree>
@@ -6888,7 +7070,7 @@
 </p:sld>
 </file>
 
-<file path=ppt/slides/slide11.xml><?xml version="1.0" encoding="utf-8"?>
+<file path=ppt/slides/slide12.xml><?xml version="1.0" encoding="utf-8"?>
 <p:sld xmlns:a="http://schemas.openxmlformats.org/drawingml/2006/main" xmlns:r="http://schemas.openxmlformats.org/officeDocument/2006/relationships" xmlns:p="http://schemas.openxmlformats.org/presentationml/2006/main">
   <p:cSld>
     <p:spTree>
@@ -7019,7 +7201,7 @@
 </p:sld>
 </file>
 
-<file path=ppt/slides/slide12.xml><?xml version="1.0" encoding="utf-8"?>
+<file path=ppt/slides/slide13.xml><?xml version="1.0" encoding="utf-8"?>
 <p:sld xmlns:a="http://schemas.openxmlformats.org/drawingml/2006/main" xmlns:r="http://schemas.openxmlformats.org/officeDocument/2006/relationships" xmlns:p="http://schemas.openxmlformats.org/presentationml/2006/main">
   <p:cSld>
     <p:spTree>
@@ -7150,7 +7332,7 @@
 </p:sld>
 </file>
 
-<file path=ppt/slides/slide13.xml><?xml version="1.0" encoding="utf-8"?>
+<file path=ppt/slides/slide14.xml><?xml version="1.0" encoding="utf-8"?>
 <p:sld xmlns:a="http://schemas.openxmlformats.org/drawingml/2006/main" xmlns:r="http://schemas.openxmlformats.org/officeDocument/2006/relationships" xmlns:p="http://schemas.openxmlformats.org/presentationml/2006/main">
   <p:cSld>
     <p:spTree>
@@ -7281,7 +7463,7 @@
 </p:sld>
 </file>
 
-<file path=ppt/slides/slide14.xml><?xml version="1.0" encoding="utf-8"?>
+<file path=ppt/slides/slide15.xml><?xml version="1.0" encoding="utf-8"?>
 <p:sld xmlns:a="http://schemas.openxmlformats.org/drawingml/2006/main" xmlns:r="http://schemas.openxmlformats.org/officeDocument/2006/relationships" xmlns:p="http://schemas.openxmlformats.org/presentationml/2006/main">
   <p:cSld>
     <p:spTree>
@@ -7412,7 +7594,7 @@
 </p:sld>
 </file>
 
-<file path=ppt/slides/slide15.xml><?xml version="1.0" encoding="utf-8"?>
+<file path=ppt/slides/slide16.xml><?xml version="1.0" encoding="utf-8"?>
 <p:sld xmlns:a="http://schemas.openxmlformats.org/drawingml/2006/main" xmlns:r="http://schemas.openxmlformats.org/officeDocument/2006/relationships" xmlns:p="http://schemas.openxmlformats.org/presentationml/2006/main">
   <p:cSld>
     <p:spTree>
@@ -7543,7 +7725,7 @@
 </p:sld>
 </file>
 
-<file path=ppt/slides/slide16.xml><?xml version="1.0" encoding="utf-8"?>
+<file path=ppt/slides/slide17.xml><?xml version="1.0" encoding="utf-8"?>
 <p:sld xmlns:a="http://schemas.openxmlformats.org/drawingml/2006/main" xmlns:r="http://schemas.openxmlformats.org/officeDocument/2006/relationships" xmlns:p="http://schemas.openxmlformats.org/presentationml/2006/main">
   <p:cSld>
     <p:spTree>
@@ -7749,7 +7931,7 @@
 </p:sld>
 </file>
 
-<file path=ppt/slides/slide17.xml><?xml version="1.0" encoding="utf-8"?>
+<file path=ppt/slides/slide18.xml><?xml version="1.0" encoding="utf-8"?>
 <p:sld xmlns:a="http://schemas.openxmlformats.org/drawingml/2006/main" xmlns:r="http://schemas.openxmlformats.org/officeDocument/2006/relationships" xmlns:p="http://schemas.openxmlformats.org/presentationml/2006/main">
   <p:cSld>
     <p:spTree>
@@ -7955,7 +8137,7 @@
 </p:sld>
 </file>
 
-<file path=ppt/slides/slide18.xml><?xml version="1.0" encoding="utf-8"?>
+<file path=ppt/slides/slide19.xml><?xml version="1.0" encoding="utf-8"?>
 <p:sld xmlns:a="http://schemas.openxmlformats.org/drawingml/2006/main" xmlns:r="http://schemas.openxmlformats.org/officeDocument/2006/relationships" xmlns:p="http://schemas.openxmlformats.org/presentationml/2006/main">
   <p:cSld>
     <p:spTree>
@@ -8086,7 +8268,257 @@
 </p:sld>
 </file>
 
-<file path=ppt/slides/slide19.xml><?xml version="1.0" encoding="utf-8"?>
+<file path=ppt/slides/slide2.xml><?xml version="1.0" encoding="utf-8"?>
+<p:sld xmlns:a="http://schemas.openxmlformats.org/drawingml/2006/main" xmlns:r="http://schemas.openxmlformats.org/officeDocument/2006/relationships" xmlns:p="http://schemas.openxmlformats.org/presentationml/2006/main">
+  <p:cSld>
+    <p:spTree>
+      <p:nvGrpSpPr>
+        <p:cNvPr id="1" name=""/>
+        <p:cNvGrpSpPr/>
+        <p:nvPr/>
+      </p:nvGrpSpPr>
+      <p:grpSpPr>
+        <a:xfrm>
+          <a:off x="0" y="0"/>
+          <a:ext cx="0" cy="0"/>
+          <a:chOff x="0" y="0"/>
+          <a:chExt cx="0" cy="0"/>
+        </a:xfrm>
+      </p:grpSpPr>
+      <p:sp>
+        <p:nvSpPr>
+          <p:cNvPr id="2" name="Content Placeholder 1"/>
+          <p:cNvSpPr>
+            <a:spLocks noGrp="1"/>
+          </p:cNvSpPr>
+          <p:nvPr>
+            <p:ph idx="1"/>
+          </p:nvPr>
+        </p:nvSpPr>
+        <p:spPr>
+          <a:xfrm>
+            <a:off x="304800" y="1493837"/>
+            <a:ext cx="8229600" cy="4906963"/>
+          </a:xfrm>
+          <a:prstGeom prst="rect">
+            <a:avLst/>
+          </a:prstGeom>
+          <a:noFill/>
+          <a:ln w="0">
+            <a:noFill/>
+          </a:ln>
+        </p:spPr>
+        <p:txBody>
+          <a:bodyPr vert="horz" lIns="91440" tIns="45720" rIns="91440" bIns="45720" anchor="t">
+            <a:normAutofit/>
+          </a:bodyPr>
+          <a:lstStyle/>
+          <a:p>
+            <a:pPr marL="457200" indent="-457200">
+              <a:lnSpc>
+                <a:spcPct val="100000"/>
+              </a:lnSpc>
+              <a:spcBef>
+                <a:spcPct val="20000"/>
+              </a:spcBef>
+              <a:spcAft>
+                <a:spcPts val="0"/>
+              </a:spcAft>
+              <a:buAutoNum type="arabicPeriod"/>
+            </a:pPr>
+            <a:r>
+              <a:rPr lang="en-US" sz="2400" b="0" i="0" kern="1200">
+                <a:solidFill>
+                  <a:srgbClr val="C00000"/>
+                </a:solidFill>
+                <a:latin typeface="Calibri"/>
+              </a:rPr>
+              <a:t>In a D-latch, output becomes equal to input when…</a:t>
+            </a:r>
+            <a:endParaRPr lang="en-US"/>
+          </a:p>
+          <a:p>
+            <a:pPr marL="457200" indent="-457200">
+              <a:lnSpc>
+                <a:spcPct val="100000"/>
+              </a:lnSpc>
+              <a:spcBef>
+                <a:spcPct val="20000"/>
+              </a:spcBef>
+              <a:spcAft>
+                <a:spcPts val="0"/>
+              </a:spcAft>
+              <a:buAutoNum type="arabicPeriod"/>
+            </a:pPr>
+            <a:endParaRPr lang="en-US" sz="2400" b="0" i="0" kern="1200">
+              <a:solidFill>
+                <a:srgbClr val="C00000"/>
+              </a:solidFill>
+              <a:latin typeface="Calibri"/>
+            </a:endParaRPr>
+          </a:p>
+          <a:p>
+            <a:pPr marL="457200" indent="-457200">
+              <a:lnSpc>
+                <a:spcPct val="100000"/>
+              </a:lnSpc>
+              <a:spcBef>
+                <a:spcPct val="20000"/>
+              </a:spcBef>
+              <a:spcAft>
+                <a:spcPts val="0"/>
+              </a:spcAft>
+              <a:buAutoNum type="arabicPeriod"/>
+            </a:pPr>
+            <a:r>
+              <a:rPr lang="en-US" sz="2400" b="0" i="0" kern="1200">
+                <a:solidFill>
+                  <a:srgbClr val="C00000"/>
+                </a:solidFill>
+                <a:latin typeface="Calibri"/>
+              </a:rPr>
+              <a:t>In a D-flipflop, output becomes equal to input when…</a:t>
+            </a:r>
+            <a:endParaRPr lang="en-US"/>
+          </a:p>
+        </p:txBody>
+      </p:sp>
+      <p:sp>
+        <p:nvSpPr>
+          <p:cNvPr id="3" name="Content Placeholder 2"/>
+          <p:cNvSpPr>
+            <a:spLocks noGrp="1"/>
+          </p:cNvSpPr>
+          <p:nvPr>
+            <p:ph sz="quarter" idx="10"/>
+          </p:nvPr>
+        </p:nvSpPr>
+        <p:spPr>
+          <a:xfrm>
+            <a:off x="304800" y="152400"/>
+            <a:ext cx="6324600" cy="1143000"/>
+          </a:xfrm>
+        </p:spPr>
+        <p:txBody>
+          <a:bodyPr anchor="ctr"/>
+          <a:lstStyle/>
+          <a:p>
+            <a:pPr>
+              <a:lnSpc>
+                <a:spcPts val="3600"/>
+              </a:lnSpc>
+              <a:spcBef>
+                <a:spcPts val="0"/>
+              </a:spcBef>
+              <a:spcAft>
+                <a:spcPct val="0"/>
+              </a:spcAft>
+              <a:buNone/>
+            </a:pPr>
+            <a:r>
+              <a:rPr lang="en-US" sz="3600" b="1" i="0" kern="1200" spc="-150" baseline="0">
+                <a:solidFill>
+                  <a:schemeClr val="tx1"/>
+                </a:solidFill>
+                <a:latin typeface="Calibri"/>
+              </a:rPr>
+              <a:t>Review questions</a:t>
+            </a:r>
+            <a:endParaRPr lang="en-IN"/>
+          </a:p>
+        </p:txBody>
+      </p:sp>
+    </p:spTree>
+  </p:cSld>
+  <p:clrMapOvr>
+    <a:masterClrMapping/>
+  </p:clrMapOvr>
+  <p:timing>
+    <p:tnLst>
+      <p:par>
+        <p:cTn id="1" dur="indefinite" restart="never" nodeType="tmRoot">
+          <p:childTnLst>
+            <p:seq concurrent="1" nextAc="seek">
+              <p:cTn id="2" dur="indefinite" nodeType="mainSeq">
+                <p:childTnLst>
+                  <p:par>
+                    <p:cTn id="3" fill="hold">
+                      <p:stCondLst>
+                        <p:cond delay="indefinite"/>
+                      </p:stCondLst>
+                      <p:childTnLst>
+                        <p:par>
+                          <p:cTn id="4" fill="hold">
+                            <p:stCondLst>
+                              <p:cond delay="0"/>
+                            </p:stCondLst>
+                            <p:childTnLst>
+                              <p:par>
+                                <p:cTn id="5" presetID="1" presetClass="entr" presetSubtype="0" fill="hold" grpId="0" nodeType="clickEffect">
+                                  <p:stCondLst>
+                                    <p:cond delay="0"/>
+                                  </p:stCondLst>
+                                  <p:childTnLst>
+                                    <p:set>
+                                      <p:cBhvr>
+                                        <p:cTn id="6" dur="1" fill="hold">
+                                          <p:stCondLst>
+                                            <p:cond delay="0"/>
+                                          </p:stCondLst>
+                                        </p:cTn>
+                                        <p:tgtEl>
+                                          <p:spTgt spid="2">
+                                            <p:txEl>
+                                              <p:pRg st="0" end="0"/>
+                                            </p:txEl>
+                                          </p:spTgt>
+                                        </p:tgtEl>
+                                        <p:attrNameLst>
+                                          <p:attrName>style.visibility</p:attrName>
+                                        </p:attrNameLst>
+                                      </p:cBhvr>
+                                      <p:to>
+                                        <p:strVal val="visible"/>
+                                      </p:to>
+                                    </p:set>
+                                  </p:childTnLst>
+                                </p:cTn>
+                              </p:par>
+                            </p:childTnLst>
+                          </p:cTn>
+                        </p:par>
+                      </p:childTnLst>
+                    </p:cTn>
+                  </p:par>
+                </p:childTnLst>
+              </p:cTn>
+              <p:prevCondLst>
+                <p:cond evt="onPrev" delay="0">
+                  <p:tgtEl>
+                    <p:sldTgt/>
+                  </p:tgtEl>
+                </p:cond>
+              </p:prevCondLst>
+              <p:nextCondLst>
+                <p:cond evt="onNext" delay="0">
+                  <p:tgtEl>
+                    <p:sldTgt/>
+                  </p:tgtEl>
+                </p:cond>
+              </p:nextCondLst>
+            </p:seq>
+          </p:childTnLst>
+        </p:cTn>
+      </p:par>
+    </p:tnLst>
+    <p:bldLst>
+      <p:bldP spid="2" grpId="0" uiExpand="1" build="p"/>
+    </p:bldLst>
+  </p:timing>
+</p:sld>
+</file>
+
+<file path=ppt/slides/slide20.xml><?xml version="1.0" encoding="utf-8"?>
 <p:sld xmlns:a="http://schemas.openxmlformats.org/drawingml/2006/main" xmlns:r="http://schemas.openxmlformats.org/officeDocument/2006/relationships" xmlns:p="http://schemas.openxmlformats.org/presentationml/2006/main">
   <p:cSld>
     <p:spTree>
@@ -8350,7 +8782,441 @@
 </p:sld>
 </file>
 
-<file path=ppt/slides/slide2.xml><?xml version="1.0" encoding="utf-8"?>
+<file path=ppt/slides/slide21.xml><?xml version="1.0" encoding="utf-8"?>
+<p:sld xmlns:a="http://schemas.openxmlformats.org/drawingml/2006/main" xmlns:r="http://schemas.openxmlformats.org/officeDocument/2006/relationships" xmlns:p="http://schemas.openxmlformats.org/presentationml/2006/main">
+  <p:cSld>
+    <p:spTree>
+      <p:nvGrpSpPr>
+        <p:cNvPr id="1" name=""/>
+        <p:cNvGrpSpPr/>
+        <p:nvPr/>
+      </p:nvGrpSpPr>
+      <p:grpSpPr>
+        <a:xfrm>
+          <a:off x="0" y="0"/>
+          <a:ext cx="0" cy="0"/>
+          <a:chOff x="0" y="0"/>
+          <a:chExt cx="0" cy="0"/>
+        </a:xfrm>
+      </p:grpSpPr>
+      <p:sp>
+        <p:nvSpPr>
+          <p:cNvPr id="3" name="Content Placeholder 2">
+            <a:extLst>
+              <a:ext uri="{FF2B5EF4-FFF2-40B4-BE49-F238E27FC236}">
+                <a16:creationId xmlns:a16="http://schemas.microsoft.com/office/drawing/2014/main" id="{A41FBB4B-05BB-59D8-D7FE-BBA5362955F3}"/>
+              </a:ext>
+            </a:extLst>
+          </p:cNvPr>
+          <p:cNvSpPr>
+            <a:spLocks noGrp="1"/>
+          </p:cNvSpPr>
+          <p:nvPr>
+            <p:ph sz="quarter" idx="10"/>
+          </p:nvPr>
+        </p:nvSpPr>
+        <p:spPr/>
+        <p:txBody>
+          <a:bodyPr>
+            <a:normAutofit/>
+          </a:bodyPr>
+          <a:lstStyle/>
+          <a:p>
+            <a:r>
+              <a:rPr lang="en-US" dirty="0"/>
+              <a:t>Serial adder from scratch implemented with shift registers</a:t>
+            </a:r>
+            <a:endParaRPr lang="en-IN" dirty="0"/>
+          </a:p>
+        </p:txBody>
+      </p:sp>
+      <p:pic>
+        <p:nvPicPr>
+          <p:cNvPr id="4" name="Picture 2">
+            <a:extLst>
+              <a:ext uri="{FF2B5EF4-FFF2-40B4-BE49-F238E27FC236}">
+                <a16:creationId xmlns:a16="http://schemas.microsoft.com/office/drawing/2014/main" id="{CEB06F35-958F-5F50-E309-139379793E10}"/>
+              </a:ext>
+            </a:extLst>
+          </p:cNvPr>
+          <p:cNvPicPr>
+            <a:picLocks noGrp="1" noChangeAspect="1" noChangeArrowheads="1"/>
+          </p:cNvPicPr>
+          <p:nvPr>
+            <p:ph idx="1"/>
+          </p:nvPr>
+        </p:nvPicPr>
+        <p:blipFill rotWithShape="1">
+          <a:blip r:embed="rId2">
+            <a:extLst>
+              <a:ext uri="{28A0092B-C50C-407E-A947-70E740481C1C}">
+                <a14:useLocalDpi xmlns:a14="http://schemas.microsoft.com/office/drawing/2010/main" val="0"/>
+              </a:ext>
+            </a:extLst>
+          </a:blip>
+          <a:srcRect b="8418"/>
+          <a:stretch>
+            <a:fillRect/>
+          </a:stretch>
+        </p:blipFill>
+        <p:spPr bwMode="auto">
+          <a:xfrm>
+            <a:off x="500099" y="1905000"/>
+            <a:ext cx="8143802" cy="4144962"/>
+          </a:xfrm>
+          <a:prstGeom prst="rect">
+            <a:avLst/>
+          </a:prstGeom>
+          <a:noFill/>
+          <a:extLst>
+            <a:ext uri="{909E8E84-426E-40DD-AFC4-6F175D3DCCD1}">
+              <a14:hiddenFill xmlns:a14="http://schemas.microsoft.com/office/drawing/2010/main">
+                <a:solidFill>
+                  <a:srgbClr val="FFFFFF"/>
+                </a:solidFill>
+              </a14:hiddenFill>
+            </a:ext>
+          </a:extLst>
+        </p:spPr>
+      </p:pic>
+    </p:spTree>
+    <p:extLst>
+      <p:ext uri="{BB962C8B-B14F-4D97-AF65-F5344CB8AC3E}">
+        <p14:creationId xmlns:p14="http://schemas.microsoft.com/office/powerpoint/2010/main" val="1656409979"/>
+      </p:ext>
+    </p:extLst>
+  </p:cSld>
+  <p:clrMapOvr>
+    <a:masterClrMapping/>
+  </p:clrMapOvr>
+</p:sld>
+</file>
+
+<file path=ppt/slides/slide22.xml><?xml version="1.0" encoding="utf-8"?>
+<p:sld xmlns:a="http://schemas.openxmlformats.org/drawingml/2006/main" xmlns:r="http://schemas.openxmlformats.org/officeDocument/2006/relationships" xmlns:p="http://schemas.openxmlformats.org/presentationml/2006/main">
+  <p:cSld>
+    <p:spTree>
+      <p:nvGrpSpPr>
+        <p:cNvPr id="1" name=""/>
+        <p:cNvGrpSpPr/>
+        <p:nvPr/>
+      </p:nvGrpSpPr>
+      <p:grpSpPr>
+        <a:xfrm>
+          <a:off x="0" y="0"/>
+          <a:ext cx="0" cy="0"/>
+          <a:chOff x="0" y="0"/>
+          <a:chExt cx="0" cy="0"/>
+        </a:xfrm>
+      </p:grpSpPr>
+      <p:sp>
+        <p:nvSpPr>
+          <p:cNvPr id="3" name="Content Placeholder 2">
+            <a:extLst>
+              <a:ext uri="{FF2B5EF4-FFF2-40B4-BE49-F238E27FC236}">
+                <a16:creationId xmlns:a16="http://schemas.microsoft.com/office/drawing/2014/main" id="{57BF30C4-14D5-5AC8-97D3-E57E18DE5164}"/>
+              </a:ext>
+            </a:extLst>
+          </p:cNvPr>
+          <p:cNvSpPr>
+            <a:spLocks noGrp="1"/>
+          </p:cNvSpPr>
+          <p:nvPr>
+            <p:ph sz="quarter" idx="10"/>
+          </p:nvPr>
+        </p:nvSpPr>
+        <p:spPr/>
+        <p:txBody>
+          <a:bodyPr/>
+          <a:lstStyle/>
+          <a:p>
+            <a:r>
+              <a:rPr lang="en-US" dirty="0"/>
+              <a:t>Universal shift register</a:t>
+            </a:r>
+            <a:endParaRPr lang="en-IN" dirty="0"/>
+          </a:p>
+        </p:txBody>
+      </p:sp>
+      <p:pic>
+        <p:nvPicPr>
+          <p:cNvPr id="4" name="Picture 2">
+            <a:extLst>
+              <a:ext uri="{FF2B5EF4-FFF2-40B4-BE49-F238E27FC236}">
+                <a16:creationId xmlns:a16="http://schemas.microsoft.com/office/drawing/2014/main" id="{12D6680F-5575-0873-7772-BDC72BC51315}"/>
+              </a:ext>
+            </a:extLst>
+          </p:cNvPr>
+          <p:cNvPicPr>
+            <a:picLocks noGrp="1" noChangeAspect="1" noChangeArrowheads="1"/>
+          </p:cNvPicPr>
+          <p:nvPr>
+            <p:ph idx="1"/>
+          </p:nvPr>
+        </p:nvPicPr>
+        <p:blipFill rotWithShape="1">
+          <a:blip r:embed="rId2">
+            <a:extLst>
+              <a:ext uri="{28A0092B-C50C-407E-A947-70E740481C1C}">
+                <a14:useLocalDpi xmlns:a14="http://schemas.microsoft.com/office/drawing/2010/main" val="0"/>
+              </a:ext>
+            </a:extLst>
+          </a:blip>
+          <a:srcRect b="6734"/>
+          <a:stretch>
+            <a:fillRect/>
+          </a:stretch>
+        </p:blipFill>
+        <p:spPr bwMode="auto">
+          <a:xfrm>
+            <a:off x="867763" y="1371600"/>
+            <a:ext cx="7408474" cy="5180226"/>
+          </a:xfrm>
+          <a:prstGeom prst="rect">
+            <a:avLst/>
+          </a:prstGeom>
+          <a:noFill/>
+          <a:extLst>
+            <a:ext uri="{909E8E84-426E-40DD-AFC4-6F175D3DCCD1}">
+              <a14:hiddenFill xmlns:a14="http://schemas.microsoft.com/office/drawing/2010/main">
+                <a:solidFill>
+                  <a:srgbClr val="FFFFFF"/>
+                </a:solidFill>
+              </a14:hiddenFill>
+            </a:ext>
+          </a:extLst>
+        </p:spPr>
+      </p:pic>
+    </p:spTree>
+    <p:extLst>
+      <p:ext uri="{BB962C8B-B14F-4D97-AF65-F5344CB8AC3E}">
+        <p14:creationId xmlns:p14="http://schemas.microsoft.com/office/powerpoint/2010/main" val="2244826845"/>
+      </p:ext>
+    </p:extLst>
+  </p:cSld>
+  <p:clrMapOvr>
+    <a:masterClrMapping/>
+  </p:clrMapOvr>
+</p:sld>
+</file>
+
+<file path=ppt/slides/slide23.xml><?xml version="1.0" encoding="utf-8"?>
+<p:sld xmlns:a="http://schemas.openxmlformats.org/drawingml/2006/main" xmlns:r="http://schemas.openxmlformats.org/officeDocument/2006/relationships" xmlns:p="http://schemas.openxmlformats.org/presentationml/2006/main">
+  <p:cSld>
+    <p:spTree>
+      <p:nvGrpSpPr>
+        <p:cNvPr id="1" name=""/>
+        <p:cNvGrpSpPr/>
+        <p:nvPr/>
+      </p:nvGrpSpPr>
+      <p:grpSpPr>
+        <a:xfrm>
+          <a:off x="0" y="0"/>
+          <a:ext cx="0" cy="0"/>
+          <a:chOff x="0" y="0"/>
+          <a:chExt cx="0" cy="0"/>
+        </a:xfrm>
+      </p:grpSpPr>
+      <p:sp>
+        <p:nvSpPr>
+          <p:cNvPr id="3" name="Content Placeholder 2">
+            <a:extLst>
+              <a:ext uri="{FF2B5EF4-FFF2-40B4-BE49-F238E27FC236}">
+                <a16:creationId xmlns:a16="http://schemas.microsoft.com/office/drawing/2014/main" id="{235DB4F5-7446-5E41-C45C-58C4AA5EE3F5}"/>
+              </a:ext>
+            </a:extLst>
+          </p:cNvPr>
+          <p:cNvSpPr>
+            <a:spLocks noGrp="1"/>
+          </p:cNvSpPr>
+          <p:nvPr>
+            <p:ph sz="quarter" idx="10"/>
+          </p:nvPr>
+        </p:nvSpPr>
+        <p:spPr/>
+        <p:txBody>
+          <a:bodyPr/>
+          <a:lstStyle/>
+          <a:p>
+            <a:r>
+              <a:rPr lang="en-US" dirty="0"/>
+              <a:t>Ring counter</a:t>
+            </a:r>
+            <a:endParaRPr lang="en-IN" dirty="0"/>
+          </a:p>
+        </p:txBody>
+      </p:sp>
+      <p:pic>
+        <p:nvPicPr>
+          <p:cNvPr id="4" name="Picture 2">
+            <a:extLst>
+              <a:ext uri="{FF2B5EF4-FFF2-40B4-BE49-F238E27FC236}">
+                <a16:creationId xmlns:a16="http://schemas.microsoft.com/office/drawing/2014/main" id="{286FA710-36FA-818B-279B-CE34EB57BC25}"/>
+              </a:ext>
+            </a:extLst>
+          </p:cNvPr>
+          <p:cNvPicPr>
+            <a:picLocks noGrp="1" noChangeAspect="1" noChangeArrowheads="1"/>
+          </p:cNvPicPr>
+          <p:nvPr>
+            <p:ph idx="1"/>
+          </p:nvPr>
+        </p:nvPicPr>
+        <p:blipFill rotWithShape="1">
+          <a:blip r:embed="rId2">
+            <a:extLst>
+              <a:ext uri="{28A0092B-C50C-407E-A947-70E740481C1C}">
+                <a14:useLocalDpi xmlns:a14="http://schemas.microsoft.com/office/drawing/2010/main" val="0"/>
+              </a:ext>
+            </a:extLst>
+          </a:blip>
+          <a:srcRect b="6734"/>
+          <a:stretch>
+            <a:fillRect/>
+          </a:stretch>
+        </p:blipFill>
+        <p:spPr bwMode="auto">
+          <a:xfrm>
+            <a:off x="1777713" y="1524000"/>
+            <a:ext cx="5588574" cy="4938979"/>
+          </a:xfrm>
+          <a:prstGeom prst="rect">
+            <a:avLst/>
+          </a:prstGeom>
+          <a:noFill/>
+          <a:extLst>
+            <a:ext uri="{909E8E84-426E-40DD-AFC4-6F175D3DCCD1}">
+              <a14:hiddenFill xmlns:a14="http://schemas.microsoft.com/office/drawing/2010/main">
+                <a:solidFill>
+                  <a:srgbClr val="FFFFFF"/>
+                </a:solidFill>
+              </a14:hiddenFill>
+            </a:ext>
+          </a:extLst>
+        </p:spPr>
+      </p:pic>
+    </p:spTree>
+    <p:extLst>
+      <p:ext uri="{BB962C8B-B14F-4D97-AF65-F5344CB8AC3E}">
+        <p14:creationId xmlns:p14="http://schemas.microsoft.com/office/powerpoint/2010/main" val="80830972"/>
+      </p:ext>
+    </p:extLst>
+  </p:cSld>
+  <p:clrMapOvr>
+    <a:masterClrMapping/>
+  </p:clrMapOvr>
+</p:sld>
+</file>
+
+<file path=ppt/slides/slide24.xml><?xml version="1.0" encoding="utf-8"?>
+<p:sld xmlns:a="http://schemas.openxmlformats.org/drawingml/2006/main" xmlns:r="http://schemas.openxmlformats.org/officeDocument/2006/relationships" xmlns:p="http://schemas.openxmlformats.org/presentationml/2006/main">
+  <p:cSld>
+    <p:spTree>
+      <p:nvGrpSpPr>
+        <p:cNvPr id="1" name=""/>
+        <p:cNvGrpSpPr/>
+        <p:nvPr/>
+      </p:nvGrpSpPr>
+      <p:grpSpPr>
+        <a:xfrm>
+          <a:off x="0" y="0"/>
+          <a:ext cx="0" cy="0"/>
+          <a:chOff x="0" y="0"/>
+          <a:chExt cx="0" cy="0"/>
+        </a:xfrm>
+      </p:grpSpPr>
+      <p:sp>
+        <p:nvSpPr>
+          <p:cNvPr id="3" name="Content Placeholder 2">
+            <a:extLst>
+              <a:ext uri="{FF2B5EF4-FFF2-40B4-BE49-F238E27FC236}">
+                <a16:creationId xmlns:a16="http://schemas.microsoft.com/office/drawing/2014/main" id="{D1C0CC6B-93B0-5DB5-C6AF-7085FF8F4AE9}"/>
+              </a:ext>
+            </a:extLst>
+          </p:cNvPr>
+          <p:cNvSpPr>
+            <a:spLocks noGrp="1"/>
+          </p:cNvSpPr>
+          <p:nvPr>
+            <p:ph sz="quarter" idx="10"/>
+          </p:nvPr>
+        </p:nvSpPr>
+        <p:spPr/>
+        <p:txBody>
+          <a:bodyPr/>
+          <a:lstStyle/>
+          <a:p>
+            <a:r>
+              <a:rPr lang="en-US" dirty="0"/>
+              <a:t>Johnson counter</a:t>
+            </a:r>
+            <a:endParaRPr lang="en-IN" dirty="0"/>
+          </a:p>
+        </p:txBody>
+      </p:sp>
+      <p:pic>
+        <p:nvPicPr>
+          <p:cNvPr id="4" name="Picture 2">
+            <a:extLst>
+              <a:ext uri="{FF2B5EF4-FFF2-40B4-BE49-F238E27FC236}">
+                <a16:creationId xmlns:a16="http://schemas.microsoft.com/office/drawing/2014/main" id="{E4C88358-9528-81C9-22C8-3A6074B4FBFD}"/>
+              </a:ext>
+            </a:extLst>
+          </p:cNvPr>
+          <p:cNvPicPr>
+            <a:picLocks noGrp="1" noChangeAspect="1" noChangeArrowheads="1"/>
+          </p:cNvPicPr>
+          <p:nvPr>
+            <p:ph idx="1"/>
+          </p:nvPr>
+        </p:nvPicPr>
+        <p:blipFill rotWithShape="1">
+          <a:blip r:embed="rId2">
+            <a:extLst>
+              <a:ext uri="{28A0092B-C50C-407E-A947-70E740481C1C}">
+                <a14:useLocalDpi xmlns:a14="http://schemas.microsoft.com/office/drawing/2010/main" val="0"/>
+              </a:ext>
+            </a:extLst>
+          </a:blip>
+          <a:srcRect b="5051"/>
+          <a:stretch>
+            <a:fillRect/>
+          </a:stretch>
+        </p:blipFill>
+        <p:spPr bwMode="auto">
+          <a:xfrm>
+            <a:off x="1740910" y="1447800"/>
+            <a:ext cx="5662180" cy="5099900"/>
+          </a:xfrm>
+          <a:prstGeom prst="rect">
+            <a:avLst/>
+          </a:prstGeom>
+          <a:noFill/>
+          <a:extLst>
+            <a:ext uri="{909E8E84-426E-40DD-AFC4-6F175D3DCCD1}">
+              <a14:hiddenFill xmlns:a14="http://schemas.microsoft.com/office/drawing/2010/main">
+                <a:solidFill>
+                  <a:srgbClr val="FFFFFF"/>
+                </a:solidFill>
+              </a14:hiddenFill>
+            </a:ext>
+          </a:extLst>
+        </p:spPr>
+      </p:pic>
+    </p:spTree>
+    <p:extLst>
+      <p:ext uri="{BB962C8B-B14F-4D97-AF65-F5344CB8AC3E}">
+        <p14:creationId xmlns:p14="http://schemas.microsoft.com/office/powerpoint/2010/main" val="2998099335"/>
+      </p:ext>
+    </p:extLst>
+  </p:cSld>
+  <p:clrMapOvr>
+    <a:masterClrMapping/>
+  </p:clrMapOvr>
+</p:sld>
+</file>
+
+<file path=ppt/slides/slide3.xml><?xml version="1.0" encoding="utf-8"?>
 <p:sld xmlns:a="http://schemas.openxmlformats.org/drawingml/2006/main" xmlns:r="http://schemas.openxmlformats.org/officeDocument/2006/relationships" xmlns:p="http://schemas.openxmlformats.org/presentationml/2006/main">
   <p:cSld>
     <p:spTree>
@@ -8818,225 +9684,7 @@
 </p:sld>
 </file>
 
-<file path=ppt/slides/slide20.xml><?xml version="1.0" encoding="utf-8"?>
-<p:sld xmlns:a="http://schemas.openxmlformats.org/drawingml/2006/main" xmlns:r="http://schemas.openxmlformats.org/officeDocument/2006/relationships" xmlns:p="http://schemas.openxmlformats.org/presentationml/2006/main">
-  <p:cSld>
-    <p:spTree>
-      <p:nvGrpSpPr>
-        <p:cNvPr id="1" name=""/>
-        <p:cNvGrpSpPr/>
-        <p:nvPr/>
-      </p:nvGrpSpPr>
-      <p:grpSpPr>
-        <a:xfrm>
-          <a:off x="0" y="0"/>
-          <a:ext cx="0" cy="0"/>
-          <a:chOff x="0" y="0"/>
-          <a:chExt cx="0" cy="0"/>
-        </a:xfrm>
-      </p:grpSpPr>
-      <p:sp>
-        <p:nvSpPr>
-          <p:cNvPr id="3" name="Content Placeholder 2">
-            <a:extLst>
-              <a:ext uri="{FF2B5EF4-FFF2-40B4-BE49-F238E27FC236}">
-                <a16:creationId xmlns:a16="http://schemas.microsoft.com/office/drawing/2014/main" id="{A41FBB4B-05BB-59D8-D7FE-BBA5362955F3}"/>
-              </a:ext>
-            </a:extLst>
-          </p:cNvPr>
-          <p:cNvSpPr>
-            <a:spLocks noGrp="1"/>
-          </p:cNvSpPr>
-          <p:nvPr>
-            <p:ph sz="quarter" idx="10"/>
-          </p:nvPr>
-        </p:nvSpPr>
-        <p:spPr/>
-        <p:txBody>
-          <a:bodyPr>
-            <a:normAutofit/>
-          </a:bodyPr>
-          <a:lstStyle/>
-          <a:p>
-            <a:r>
-              <a:rPr lang="en-US" dirty="0"/>
-              <a:t>Serial adder from scratch implemented with shift registers</a:t>
-            </a:r>
-            <a:endParaRPr lang="en-IN" dirty="0"/>
-          </a:p>
-        </p:txBody>
-      </p:sp>
-      <p:pic>
-        <p:nvPicPr>
-          <p:cNvPr id="4" name="Picture 2">
-            <a:extLst>
-              <a:ext uri="{FF2B5EF4-FFF2-40B4-BE49-F238E27FC236}">
-                <a16:creationId xmlns:a16="http://schemas.microsoft.com/office/drawing/2014/main" id="{CEB06F35-958F-5F50-E309-139379793E10}"/>
-              </a:ext>
-            </a:extLst>
-          </p:cNvPr>
-          <p:cNvPicPr>
-            <a:picLocks noGrp="1" noChangeAspect="1" noChangeArrowheads="1"/>
-          </p:cNvPicPr>
-          <p:nvPr>
-            <p:ph idx="1"/>
-          </p:nvPr>
-        </p:nvPicPr>
-        <p:blipFill rotWithShape="1">
-          <a:blip r:embed="rId2">
-            <a:extLst>
-              <a:ext uri="{28A0092B-C50C-407E-A947-70E740481C1C}">
-                <a14:useLocalDpi xmlns:a14="http://schemas.microsoft.com/office/drawing/2010/main" val="0"/>
-              </a:ext>
-            </a:extLst>
-          </a:blip>
-          <a:srcRect b="8418"/>
-          <a:stretch>
-            <a:fillRect/>
-          </a:stretch>
-        </p:blipFill>
-        <p:spPr bwMode="auto">
-          <a:xfrm>
-            <a:off x="500099" y="1905000"/>
-            <a:ext cx="8143802" cy="4144962"/>
-          </a:xfrm>
-          <a:prstGeom prst="rect">
-            <a:avLst/>
-          </a:prstGeom>
-          <a:noFill/>
-          <a:extLst>
-            <a:ext uri="{909E8E84-426E-40DD-AFC4-6F175D3DCCD1}">
-              <a14:hiddenFill xmlns:a14="http://schemas.microsoft.com/office/drawing/2010/main">
-                <a:solidFill>
-                  <a:srgbClr val="FFFFFF"/>
-                </a:solidFill>
-              </a14:hiddenFill>
-            </a:ext>
-          </a:extLst>
-        </p:spPr>
-      </p:pic>
-    </p:spTree>
-    <p:extLst>
-      <p:ext uri="{BB962C8B-B14F-4D97-AF65-F5344CB8AC3E}">
-        <p14:creationId xmlns:p14="http://schemas.microsoft.com/office/powerpoint/2010/main" val="1656409979"/>
-      </p:ext>
-    </p:extLst>
-  </p:cSld>
-  <p:clrMapOvr>
-    <a:masterClrMapping/>
-  </p:clrMapOvr>
-</p:sld>
-</file>
-
-<file path=ppt/slides/slide21.xml><?xml version="1.0" encoding="utf-8"?>
-<p:sld xmlns:a="http://schemas.openxmlformats.org/drawingml/2006/main" xmlns:r="http://schemas.openxmlformats.org/officeDocument/2006/relationships" xmlns:p="http://schemas.openxmlformats.org/presentationml/2006/main">
-  <p:cSld>
-    <p:spTree>
-      <p:nvGrpSpPr>
-        <p:cNvPr id="1" name=""/>
-        <p:cNvGrpSpPr/>
-        <p:nvPr/>
-      </p:nvGrpSpPr>
-      <p:grpSpPr>
-        <a:xfrm>
-          <a:off x="0" y="0"/>
-          <a:ext cx="0" cy="0"/>
-          <a:chOff x="0" y="0"/>
-          <a:chExt cx="0" cy="0"/>
-        </a:xfrm>
-      </p:grpSpPr>
-      <p:sp>
-        <p:nvSpPr>
-          <p:cNvPr id="3" name="Content Placeholder 2">
-            <a:extLst>
-              <a:ext uri="{FF2B5EF4-FFF2-40B4-BE49-F238E27FC236}">
-                <a16:creationId xmlns:a16="http://schemas.microsoft.com/office/drawing/2014/main" id="{57BF30C4-14D5-5AC8-97D3-E57E18DE5164}"/>
-              </a:ext>
-            </a:extLst>
-          </p:cNvPr>
-          <p:cNvSpPr>
-            <a:spLocks noGrp="1"/>
-          </p:cNvSpPr>
-          <p:nvPr>
-            <p:ph sz="quarter" idx="10"/>
-          </p:nvPr>
-        </p:nvSpPr>
-        <p:spPr/>
-        <p:txBody>
-          <a:bodyPr/>
-          <a:lstStyle/>
-          <a:p>
-            <a:r>
-              <a:rPr lang="en-US" dirty="0"/>
-              <a:t>Universal shift register</a:t>
-            </a:r>
-            <a:endParaRPr lang="en-IN" dirty="0"/>
-          </a:p>
-        </p:txBody>
-      </p:sp>
-      <p:pic>
-        <p:nvPicPr>
-          <p:cNvPr id="4" name="Picture 2">
-            <a:extLst>
-              <a:ext uri="{FF2B5EF4-FFF2-40B4-BE49-F238E27FC236}">
-                <a16:creationId xmlns:a16="http://schemas.microsoft.com/office/drawing/2014/main" id="{12D6680F-5575-0873-7772-BDC72BC51315}"/>
-              </a:ext>
-            </a:extLst>
-          </p:cNvPr>
-          <p:cNvPicPr>
-            <a:picLocks noGrp="1" noChangeAspect="1" noChangeArrowheads="1"/>
-          </p:cNvPicPr>
-          <p:nvPr>
-            <p:ph idx="1"/>
-          </p:nvPr>
-        </p:nvPicPr>
-        <p:blipFill rotWithShape="1">
-          <a:blip r:embed="rId2">
-            <a:extLst>
-              <a:ext uri="{28A0092B-C50C-407E-A947-70E740481C1C}">
-                <a14:useLocalDpi xmlns:a14="http://schemas.microsoft.com/office/drawing/2010/main" val="0"/>
-              </a:ext>
-            </a:extLst>
-          </a:blip>
-          <a:srcRect b="6734"/>
-          <a:stretch>
-            <a:fillRect/>
-          </a:stretch>
-        </p:blipFill>
-        <p:spPr bwMode="auto">
-          <a:xfrm>
-            <a:off x="867763" y="1371600"/>
-            <a:ext cx="7408474" cy="5180226"/>
-          </a:xfrm>
-          <a:prstGeom prst="rect">
-            <a:avLst/>
-          </a:prstGeom>
-          <a:noFill/>
-          <a:extLst>
-            <a:ext uri="{909E8E84-426E-40DD-AFC4-6F175D3DCCD1}">
-              <a14:hiddenFill xmlns:a14="http://schemas.microsoft.com/office/drawing/2010/main">
-                <a:solidFill>
-                  <a:srgbClr val="FFFFFF"/>
-                </a:solidFill>
-              </a14:hiddenFill>
-            </a:ext>
-          </a:extLst>
-        </p:spPr>
-      </p:pic>
-    </p:spTree>
-    <p:extLst>
-      <p:ext uri="{BB962C8B-B14F-4D97-AF65-F5344CB8AC3E}">
-        <p14:creationId xmlns:p14="http://schemas.microsoft.com/office/powerpoint/2010/main" val="2244826845"/>
-      </p:ext>
-    </p:extLst>
-  </p:cSld>
-  <p:clrMapOvr>
-    <a:masterClrMapping/>
-  </p:clrMapOvr>
-</p:sld>
-</file>
-
-<file path=ppt/slides/slide3.xml><?xml version="1.0" encoding="utf-8"?>
+<file path=ppt/slides/slide4.xml><?xml version="1.0" encoding="utf-8"?>
 <p:sld xmlns:a="http://schemas.openxmlformats.org/drawingml/2006/main" xmlns:r="http://schemas.openxmlformats.org/officeDocument/2006/relationships" xmlns:p="http://schemas.openxmlformats.org/presentationml/2006/main">
   <p:cSld>
     <p:spTree>
@@ -9392,7 +10040,7 @@
 </p:sld>
 </file>
 
-<file path=ppt/slides/slide4.xml><?xml version="1.0" encoding="utf-8"?>
+<file path=ppt/slides/slide5.xml><?xml version="1.0" encoding="utf-8"?>
 <p:sld xmlns:a="http://schemas.openxmlformats.org/drawingml/2006/main" xmlns:r="http://schemas.openxmlformats.org/officeDocument/2006/relationships" xmlns:p="http://schemas.openxmlformats.org/presentationml/2006/main">
   <p:cSld>
     <p:spTree>
@@ -9828,7 +10476,7 @@
 </p:sld>
 </file>
 
-<file path=ppt/slides/slide5.xml><?xml version="1.0" encoding="utf-8"?>
+<file path=ppt/slides/slide6.xml><?xml version="1.0" encoding="utf-8"?>
 <p:sld xmlns:a="http://schemas.openxmlformats.org/drawingml/2006/main" xmlns:r="http://schemas.openxmlformats.org/officeDocument/2006/relationships" xmlns:p="http://schemas.openxmlformats.org/presentationml/2006/main">
   <p:cSld>
     <p:spTree>
@@ -10149,7 +10797,7 @@
 </p:sld>
 </file>
 
-<file path=ppt/slides/slide6.xml><?xml version="1.0" encoding="utf-8"?>
+<file path=ppt/slides/slide7.xml><?xml version="1.0" encoding="utf-8"?>
 <p:sld xmlns:a="http://schemas.openxmlformats.org/drawingml/2006/main" xmlns:r="http://schemas.openxmlformats.org/officeDocument/2006/relationships" xmlns:p="http://schemas.openxmlformats.org/presentationml/2006/main">
   <p:cSld>
     <p:spTree>
@@ -10610,7 +11258,7 @@
 </p:sld>
 </file>
 
-<file path=ppt/slides/slide7.xml><?xml version="1.0" encoding="utf-8"?>
+<file path=ppt/slides/slide8.xml><?xml version="1.0" encoding="utf-8"?>
 <p:sld xmlns:a="http://schemas.openxmlformats.org/drawingml/2006/main" xmlns:r="http://schemas.openxmlformats.org/officeDocument/2006/relationships" xmlns:p="http://schemas.openxmlformats.org/presentationml/2006/main">
   <p:cSld>
     <p:spTree>
@@ -10886,114 +11534,6 @@
 </p:sld>
 </file>
 
-<file path=ppt/slides/slide8.xml><?xml version="1.0" encoding="utf-8"?>
-<p:sld xmlns:a="http://schemas.openxmlformats.org/drawingml/2006/main" xmlns:r="http://schemas.openxmlformats.org/officeDocument/2006/relationships" xmlns:p="http://schemas.openxmlformats.org/presentationml/2006/main">
-  <p:cSld>
-    <p:spTree>
-      <p:nvGrpSpPr>
-        <p:cNvPr id="1" name=""/>
-        <p:cNvGrpSpPr/>
-        <p:nvPr/>
-      </p:nvGrpSpPr>
-      <p:grpSpPr>
-        <a:xfrm>
-          <a:off x="0" y="0"/>
-          <a:ext cx="0" cy="0"/>
-          <a:chOff x="0" y="0"/>
-          <a:chExt cx="0" cy="0"/>
-        </a:xfrm>
-      </p:grpSpPr>
-      <p:sp>
-        <p:nvSpPr>
-          <p:cNvPr id="3" name="Content Placeholder 2">
-            <a:extLst>
-              <a:ext uri="{FF2B5EF4-FFF2-40B4-BE49-F238E27FC236}">
-                <a16:creationId xmlns:a16="http://schemas.microsoft.com/office/drawing/2014/main" id="{916DEC46-C490-FF55-75D3-D683BEC8FB1C}"/>
-              </a:ext>
-            </a:extLst>
-          </p:cNvPr>
-          <p:cNvSpPr>
-            <a:spLocks noGrp="1"/>
-          </p:cNvSpPr>
-          <p:nvPr>
-            <p:ph sz="quarter" idx="10"/>
-          </p:nvPr>
-        </p:nvSpPr>
-        <p:spPr/>
-        <p:txBody>
-          <a:bodyPr/>
-          <a:lstStyle/>
-          <a:p>
-            <a:r>
-              <a:rPr lang="en-US" dirty="0"/>
-              <a:t>Parallel load without Muxes</a:t>
-            </a:r>
-            <a:endParaRPr lang="en-IN" dirty="0"/>
-          </a:p>
-        </p:txBody>
-      </p:sp>
-      <p:pic>
-        <p:nvPicPr>
-          <p:cNvPr id="4" name="Picture 2">
-            <a:extLst>
-              <a:ext uri="{FF2B5EF4-FFF2-40B4-BE49-F238E27FC236}">
-                <a16:creationId xmlns:a16="http://schemas.microsoft.com/office/drawing/2014/main" id="{E33B6234-26A4-4683-A128-3E9B4122E750}"/>
-              </a:ext>
-            </a:extLst>
-          </p:cNvPr>
-          <p:cNvPicPr>
-            <a:picLocks noGrp="1" noChangeAspect="1" noChangeArrowheads="1"/>
-          </p:cNvPicPr>
-          <p:nvPr>
-            <p:ph idx="1"/>
-          </p:nvPr>
-        </p:nvPicPr>
-        <p:blipFill rotWithShape="1">
-          <a:blip r:embed="rId2">
-            <a:extLst>
-              <a:ext uri="{28A0092B-C50C-407E-A947-70E740481C1C}">
-                <a14:useLocalDpi xmlns:a14="http://schemas.microsoft.com/office/drawing/2010/main" val="0"/>
-              </a:ext>
-            </a:extLst>
-          </a:blip>
-          <a:srcRect b="5051"/>
-          <a:stretch>
-            <a:fillRect/>
-          </a:stretch>
-        </p:blipFill>
-        <p:spPr bwMode="auto">
-          <a:xfrm>
-            <a:off x="1951637" y="1371600"/>
-            <a:ext cx="5240726" cy="5135562"/>
-          </a:xfrm>
-          <a:prstGeom prst="rect">
-            <a:avLst/>
-          </a:prstGeom>
-          <a:noFill/>
-          <a:extLst>
-            <a:ext uri="{909E8E84-426E-40DD-AFC4-6F175D3DCCD1}">
-              <a14:hiddenFill xmlns:a14="http://schemas.microsoft.com/office/drawing/2010/main">
-                <a:solidFill>
-                  <a:srgbClr val="FFFFFF"/>
-                </a:solidFill>
-              </a14:hiddenFill>
-            </a:ext>
-          </a:extLst>
-        </p:spPr>
-      </p:pic>
-    </p:spTree>
-    <p:extLst>
-      <p:ext uri="{BB962C8B-B14F-4D97-AF65-F5344CB8AC3E}">
-        <p14:creationId xmlns:p14="http://schemas.microsoft.com/office/powerpoint/2010/main" val="58599281"/>
-      </p:ext>
-    </p:extLst>
-  </p:cSld>
-  <p:clrMapOvr>
-    <a:masterClrMapping/>
-  </p:clrMapOvr>
-</p:sld>
-</file>
-
 <file path=ppt/slides/slide9.xml><?xml version="1.0" encoding="utf-8"?>
 <p:sld xmlns:a="http://schemas.openxmlformats.org/drawingml/2006/main" xmlns:r="http://schemas.openxmlformats.org/officeDocument/2006/relationships" xmlns:p="http://schemas.openxmlformats.org/presentationml/2006/main">
   <p:cSld>
@@ -11016,7 +11556,7 @@
           <p:cNvPr id="3" name="Content Placeholder 2">
             <a:extLst>
               <a:ext uri="{FF2B5EF4-FFF2-40B4-BE49-F238E27FC236}">
-                <a16:creationId xmlns:a16="http://schemas.microsoft.com/office/drawing/2014/main" id="{3B1009BF-5637-6497-7999-FAE1505BC040}"/>
+                <a16:creationId xmlns:a16="http://schemas.microsoft.com/office/drawing/2014/main" id="{916DEC46-C490-FF55-75D3-D683BEC8FB1C}"/>
               </a:ext>
             </a:extLst>
           </p:cNvPr>
@@ -11034,7 +11574,7 @@
           <a:p>
             <a:r>
               <a:rPr lang="en-US" dirty="0"/>
-              <a:t>Shift registers</a:t>
+              <a:t>Parallel load without Muxes</a:t>
             </a:r>
             <a:endParaRPr lang="en-IN" dirty="0"/>
           </a:p>
@@ -11045,7 +11585,7 @@
           <p:cNvPr id="4" name="Picture 2">
             <a:extLst>
               <a:ext uri="{FF2B5EF4-FFF2-40B4-BE49-F238E27FC236}">
-                <a16:creationId xmlns:a16="http://schemas.microsoft.com/office/drawing/2014/main" id="{5CE98A39-670D-046E-38CA-C085F0B590CC}"/>
+                <a16:creationId xmlns:a16="http://schemas.microsoft.com/office/drawing/2014/main" id="{E33B6234-26A4-4683-A128-3E9B4122E750}"/>
               </a:ext>
             </a:extLst>
           </p:cNvPr>
@@ -11064,50 +11604,27 @@
               </a:ext>
             </a:extLst>
           </a:blip>
-          <a:srcRect t="11387"/>
+          <a:srcRect b="5051"/>
           <a:stretch>
             <a:fillRect/>
           </a:stretch>
         </p:blipFill>
         <p:spPr bwMode="auto">
           <a:xfrm>
-            <a:off x="304800" y="1447800"/>
-            <a:ext cx="8534400" cy="5050344"/>
+            <a:off x="1951637" y="1371600"/>
+            <a:ext cx="5240726" cy="5135562"/>
           </a:xfrm>
           <a:prstGeom prst="rect">
             <a:avLst/>
           </a:prstGeom>
           <a:noFill/>
-          <a:ln>
-            <a:noFill/>
-          </a:ln>
-          <a:effectLst/>
           <a:extLst>
             <a:ext uri="{909E8E84-426E-40DD-AFC4-6F175D3DCCD1}">
               <a14:hiddenFill xmlns:a14="http://schemas.microsoft.com/office/drawing/2010/main">
                 <a:solidFill>
-                  <a:schemeClr val="accent1"/>
+                  <a:srgbClr val="FFFFFF"/>
                 </a:solidFill>
               </a14:hiddenFill>
-            </a:ext>
-            <a:ext uri="{91240B29-F687-4F45-9708-019B960494DF}">
-              <a14:hiddenLine xmlns:a14="http://schemas.microsoft.com/office/drawing/2010/main" w="9525">
-                <a:solidFill>
-                  <a:schemeClr val="tx1"/>
-                </a:solidFill>
-                <a:miter lim="800000"/>
-                <a:headEnd/>
-                <a:tailEnd/>
-              </a14:hiddenLine>
-            </a:ext>
-            <a:ext uri="{AF507438-7753-43E0-B8FC-AC1667EBCBE1}">
-              <a14:hiddenEffects xmlns:a14="http://schemas.microsoft.com/office/drawing/2010/main">
-                <a:effectLst>
-                  <a:outerShdw dist="35921" dir="2700000" algn="ctr" rotWithShape="0">
-                    <a:schemeClr val="bg2"/>
-                  </a:outerShdw>
-                </a:effectLst>
-              </a14:hiddenEffects>
             </a:ext>
           </a:extLst>
         </p:spPr>
@@ -11115,7 +11632,7 @@
     </p:spTree>
     <p:extLst>
       <p:ext uri="{BB962C8B-B14F-4D97-AF65-F5344CB8AC3E}">
-        <p14:creationId xmlns:p14="http://schemas.microsoft.com/office/powerpoint/2010/main" val="2871934050"/>
+        <p14:creationId xmlns:p14="http://schemas.microsoft.com/office/powerpoint/2010/main" val="58599281"/>
       </p:ext>
     </p:extLst>
   </p:cSld>
